--- a/chapter_06/figures/ai_models.pptx
+++ b/chapter_06/figures/ai_models.pptx
@@ -2,7 +2,7 @@
 <file path=ppt/presentation.xml><?xml version="1.0" encoding="utf-8"?>
 <p:presentation xmlns:a="http://schemas.openxmlformats.org/drawingml/2006/main" xmlns:r="http://schemas.openxmlformats.org/officeDocument/2006/relationships" xmlns:p="http://schemas.openxmlformats.org/presentationml/2006/main" saveSubsetFonts="1">
   <p:sldMasterIdLst>
-    <p:sldMasterId id="2147483696" r:id="rId1"/>
+    <p:sldMasterId id="2147483732" r:id="rId1"/>
   </p:sldMasterIdLst>
   <p:notesMasterIdLst>
     <p:notesMasterId r:id="rId3"/>
@@ -10,7 +10,7 @@
   <p:sldIdLst>
     <p:sldId id="256" r:id="rId2"/>
   </p:sldIdLst>
-  <p:sldSz cx="2987675" cy="1728788"/>
+  <p:sldSz cx="4140200" cy="2087563"/>
   <p:notesSz cx="6858000" cy="9144000"/>
   <p:defaultTextStyle>
     <a:defPPr>
@@ -118,7 +118,7 @@
 <file path=ppt/revisionInfo.xml><?xml version="1.0" encoding="utf-8"?>
 <p1510:revInfo xmlns:a="http://schemas.openxmlformats.org/drawingml/2006/main" xmlns:r="http://schemas.openxmlformats.org/officeDocument/2006/relationships" xmlns:p1510="http://schemas.microsoft.com/office/powerpoint/2015/10/main">
   <p1510:revLst>
-    <p1510:client id="{EB656BF9-2C3D-4E41-A7D8-2F606427876B}" v="7" dt="2025-11-19T15:51:50.790"/>
+    <p1510:client id="{6A7E21DF-2D91-46CA-98F5-69AE5D7B18F8}" v="9" dt="2026-01-26T16:00:39.488"/>
   </p1510:revLst>
 </p1510:revInfo>
 </file>
@@ -128,294 +128,350 @@
   <pc:docChgLst>
     <pc:chgData name="Fatima Pillosu" userId="a6295d4dc9e22643" providerId="LiveId" clId="{87453732-75AC-4426-B5D3-B7C69C2D4F54}"/>
     <pc:docChg chg="undo custSel modSld">
-      <pc:chgData name="Fatima Pillosu" userId="a6295d4dc9e22643" providerId="LiveId" clId="{87453732-75AC-4426-B5D3-B7C69C2D4F54}" dt="2025-11-19T16:02:07.822" v="527" actId="20577"/>
+      <pc:chgData name="Fatima Pillosu" userId="a6295d4dc9e22643" providerId="LiveId" clId="{87453732-75AC-4426-B5D3-B7C69C2D4F54}" dt="2026-01-26T16:00:45.763" v="614" actId="1035"/>
       <pc:docMkLst>
         <pc:docMk/>
       </pc:docMkLst>
       <pc:sldChg chg="addSp delSp modSp mod">
-        <pc:chgData name="Fatima Pillosu" userId="a6295d4dc9e22643" providerId="LiveId" clId="{87453732-75AC-4426-B5D3-B7C69C2D4F54}" dt="2025-11-19T16:02:07.822" v="527" actId="20577"/>
+        <pc:chgData name="Fatima Pillosu" userId="a6295d4dc9e22643" providerId="LiveId" clId="{87453732-75AC-4426-B5D3-B7C69C2D4F54}" dt="2026-01-26T16:00:45.763" v="614" actId="1035"/>
         <pc:sldMkLst>
           <pc:docMk/>
           <pc:sldMk cId="445470335" sldId="256"/>
         </pc:sldMkLst>
-        <pc:spChg chg="add del mod">
-          <ac:chgData name="Fatima Pillosu" userId="a6295d4dc9e22643" providerId="LiveId" clId="{87453732-75AC-4426-B5D3-B7C69C2D4F54}" dt="2025-11-19T15:25:31.238" v="39" actId="478"/>
+        <pc:spChg chg="add mod">
+          <ac:chgData name="Fatima Pillosu" userId="a6295d4dc9e22643" providerId="LiveId" clId="{87453732-75AC-4426-B5D3-B7C69C2D4F54}" dt="2026-01-26T15:57:08.392" v="531" actId="164"/>
           <ac:spMkLst>
             <pc:docMk/>
             <pc:sldMk cId="445470335" sldId="256"/>
-            <ac:spMk id="2" creationId="{BE23CF9C-DF5C-B1A7-DEC1-49EAAF70AF55}"/>
+            <ac:spMk id="2" creationId="{539947CB-ED39-536C-6C0B-2EB551D05FFE}"/>
+          </ac:spMkLst>
+        </pc:spChg>
+        <pc:spChg chg="add mod">
+          <ac:chgData name="Fatima Pillosu" userId="a6295d4dc9e22643" providerId="LiveId" clId="{87453732-75AC-4426-B5D3-B7C69C2D4F54}" dt="2026-01-26T15:57:08.392" v="531" actId="164"/>
+          <ac:spMkLst>
+            <pc:docMk/>
+            <pc:sldMk cId="445470335" sldId="256"/>
+            <ac:spMk id="3" creationId="{D7DE0A7F-FCD3-FD48-0A9C-2B36992C28EF}"/>
+          </ac:spMkLst>
+        </pc:spChg>
+        <pc:spChg chg="add mod">
+          <ac:chgData name="Fatima Pillosu" userId="a6295d4dc9e22643" providerId="LiveId" clId="{87453732-75AC-4426-B5D3-B7C69C2D4F54}" dt="2026-01-26T15:57:08.392" v="531" actId="164"/>
+          <ac:spMkLst>
+            <pc:docMk/>
+            <pc:sldMk cId="445470335" sldId="256"/>
+            <ac:spMk id="4" creationId="{FDD47B8C-923F-C61A-E03C-069006159CDB}"/>
+          </ac:spMkLst>
+        </pc:spChg>
+        <pc:spChg chg="add mod">
+          <ac:chgData name="Fatima Pillosu" userId="a6295d4dc9e22643" providerId="LiveId" clId="{87453732-75AC-4426-B5D3-B7C69C2D4F54}" dt="2026-01-26T15:57:08.392" v="531" actId="164"/>
+          <ac:spMkLst>
+            <pc:docMk/>
+            <pc:sldMk cId="445470335" sldId="256"/>
+            <ac:spMk id="5" creationId="{AF6F7306-7237-ACF1-4BD0-361B5EB6DD34}"/>
+          </ac:spMkLst>
+        </pc:spChg>
+        <pc:spChg chg="add mod">
+          <ac:chgData name="Fatima Pillosu" userId="a6295d4dc9e22643" providerId="LiveId" clId="{87453732-75AC-4426-B5D3-B7C69C2D4F54}" dt="2026-01-26T15:57:08.392" v="531" actId="164"/>
+          <ac:spMkLst>
+            <pc:docMk/>
+            <pc:sldMk cId="445470335" sldId="256"/>
+            <ac:spMk id="7" creationId="{14EFAF95-6DE1-56F0-5604-18B87190C743}"/>
+          </ac:spMkLst>
+        </pc:spChg>
+        <pc:spChg chg="add mod">
+          <ac:chgData name="Fatima Pillosu" userId="a6295d4dc9e22643" providerId="LiveId" clId="{87453732-75AC-4426-B5D3-B7C69C2D4F54}" dt="2026-01-26T15:57:08.392" v="531" actId="164"/>
+          <ac:spMkLst>
+            <pc:docMk/>
+            <pc:sldMk cId="445470335" sldId="256"/>
+            <ac:spMk id="8" creationId="{F4B0B3BD-E28C-3EA5-DFB4-786F273A8F4D}"/>
+          </ac:spMkLst>
+        </pc:spChg>
+        <pc:spChg chg="mod">
+          <ac:chgData name="Fatima Pillosu" userId="a6295d4dc9e22643" providerId="LiveId" clId="{87453732-75AC-4426-B5D3-B7C69C2D4F54}" dt="2026-01-26T15:58:18.164" v="541" actId="207"/>
+          <ac:spMkLst>
+            <pc:docMk/>
+            <pc:sldMk cId="445470335" sldId="256"/>
+            <ac:spMk id="13" creationId="{539947CB-ED39-536C-6C0B-2EB551D05FFE}"/>
+          </ac:spMkLst>
+        </pc:spChg>
+        <pc:spChg chg="mod">
+          <ac:chgData name="Fatima Pillosu" userId="a6295d4dc9e22643" providerId="LiveId" clId="{87453732-75AC-4426-B5D3-B7C69C2D4F54}" dt="2026-01-26T15:58:18.164" v="541" actId="207"/>
+          <ac:spMkLst>
+            <pc:docMk/>
+            <pc:sldMk cId="445470335" sldId="256"/>
+            <ac:spMk id="14" creationId="{D7DE0A7F-FCD3-FD48-0A9C-2B36992C28EF}"/>
+          </ac:spMkLst>
+        </pc:spChg>
+        <pc:spChg chg="mod">
+          <ac:chgData name="Fatima Pillosu" userId="a6295d4dc9e22643" providerId="LiveId" clId="{87453732-75AC-4426-B5D3-B7C69C2D4F54}" dt="2026-01-26T15:58:18.164" v="541" actId="207"/>
+          <ac:spMkLst>
+            <pc:docMk/>
+            <pc:sldMk cId="445470335" sldId="256"/>
+            <ac:spMk id="15" creationId="{FDD47B8C-923F-C61A-E03C-069006159CDB}"/>
+          </ac:spMkLst>
+        </pc:spChg>
+        <pc:spChg chg="mod">
+          <ac:chgData name="Fatima Pillosu" userId="a6295d4dc9e22643" providerId="LiveId" clId="{87453732-75AC-4426-B5D3-B7C69C2D4F54}" dt="2026-01-26T15:57:26.345" v="534"/>
+          <ac:spMkLst>
+            <pc:docMk/>
+            <pc:sldMk cId="445470335" sldId="256"/>
+            <ac:spMk id="16" creationId="{AF6F7306-7237-ACF1-4BD0-361B5EB6DD34}"/>
           </ac:spMkLst>
         </pc:spChg>
         <pc:spChg chg="add del mod">
-          <ac:chgData name="Fatima Pillosu" userId="a6295d4dc9e22643" providerId="LiveId" clId="{87453732-75AC-4426-B5D3-B7C69C2D4F54}" dt="2025-11-19T15:35:57.587" v="267" actId="21"/>
-          <ac:spMkLst>
-            <pc:docMk/>
-            <pc:sldMk cId="445470335" sldId="256"/>
-            <ac:spMk id="4" creationId="{539947CB-ED39-536C-6C0B-2EB551D05FFE}"/>
-          </ac:spMkLst>
-        </pc:spChg>
-        <pc:spChg chg="add del mod">
-          <ac:chgData name="Fatima Pillosu" userId="a6295d4dc9e22643" providerId="LiveId" clId="{87453732-75AC-4426-B5D3-B7C69C2D4F54}" dt="2025-11-19T15:23:55.361" v="9" actId="478"/>
-          <ac:spMkLst>
-            <pc:docMk/>
-            <pc:sldMk cId="445470335" sldId="256"/>
-            <ac:spMk id="5" creationId="{8F511433-B364-9A87-DA5F-12F0EE6EB340}"/>
-          </ac:spMkLst>
-        </pc:spChg>
-        <pc:spChg chg="add del mod">
-          <ac:chgData name="Fatima Pillosu" userId="a6295d4dc9e22643" providerId="LiveId" clId="{87453732-75AC-4426-B5D3-B7C69C2D4F54}" dt="2025-11-19T15:35:57.587" v="267" actId="21"/>
-          <ac:spMkLst>
-            <pc:docMk/>
-            <pc:sldMk cId="445470335" sldId="256"/>
-            <ac:spMk id="6" creationId="{D7DE0A7F-FCD3-FD48-0A9C-2B36992C28EF}"/>
-          </ac:spMkLst>
-        </pc:spChg>
-        <pc:spChg chg="add del mod">
-          <ac:chgData name="Fatima Pillosu" userId="a6295d4dc9e22643" providerId="LiveId" clId="{87453732-75AC-4426-B5D3-B7C69C2D4F54}" dt="2025-11-19T15:23:56.183" v="10" actId="478"/>
-          <ac:spMkLst>
-            <pc:docMk/>
-            <pc:sldMk cId="445470335" sldId="256"/>
-            <ac:spMk id="8" creationId="{6601D026-32BE-9F49-EAB4-5732D77734A8}"/>
-          </ac:spMkLst>
-        </pc:spChg>
-        <pc:spChg chg="add del mod">
-          <ac:chgData name="Fatima Pillosu" userId="a6295d4dc9e22643" providerId="LiveId" clId="{87453732-75AC-4426-B5D3-B7C69C2D4F54}" dt="2025-11-19T15:35:57.587" v="267" actId="21"/>
-          <ac:spMkLst>
-            <pc:docMk/>
-            <pc:sldMk cId="445470335" sldId="256"/>
-            <ac:spMk id="9" creationId="{FDD47B8C-923F-C61A-E03C-069006159CDB}"/>
-          </ac:spMkLst>
-        </pc:spChg>
-        <pc:spChg chg="add del mod">
-          <ac:chgData name="Fatima Pillosu" userId="a6295d4dc9e22643" providerId="LiveId" clId="{87453732-75AC-4426-B5D3-B7C69C2D4F54}" dt="2025-11-19T15:35:57.587" v="267" actId="21"/>
-          <ac:spMkLst>
-            <pc:docMk/>
-            <pc:sldMk cId="445470335" sldId="256"/>
-            <ac:spMk id="11" creationId="{AF6F7306-7237-ACF1-4BD0-361B5EB6DD34}"/>
-          </ac:spMkLst>
-        </pc:spChg>
-        <pc:spChg chg="add del mod">
-          <ac:chgData name="Fatima Pillosu" userId="a6295d4dc9e22643" providerId="LiveId" clId="{87453732-75AC-4426-B5D3-B7C69C2D4F54}" dt="2025-11-19T15:35:57.587" v="267" actId="21"/>
-          <ac:spMkLst>
-            <pc:docMk/>
-            <pc:sldMk cId="445470335" sldId="256"/>
-            <ac:spMk id="12" creationId="{14EFAF95-6DE1-56F0-5604-18B87190C743}"/>
-          </ac:spMkLst>
-        </pc:spChg>
-        <pc:spChg chg="add del mod">
-          <ac:chgData name="Fatima Pillosu" userId="a6295d4dc9e22643" providerId="LiveId" clId="{87453732-75AC-4426-B5D3-B7C69C2D4F54}" dt="2025-11-19T15:35:57.587" v="267" actId="21"/>
-          <ac:spMkLst>
-            <pc:docMk/>
-            <pc:sldMk cId="445470335" sldId="256"/>
-            <ac:spMk id="13" creationId="{F4B0B3BD-E28C-3EA5-DFB4-786F273A8F4D}"/>
-          </ac:spMkLst>
-        </pc:spChg>
-        <pc:spChg chg="add del">
-          <ac:chgData name="Fatima Pillosu" userId="a6295d4dc9e22643" providerId="LiveId" clId="{87453732-75AC-4426-B5D3-B7C69C2D4F54}" dt="2025-11-19T15:35:54.290" v="266" actId="478"/>
-          <ac:spMkLst>
-            <pc:docMk/>
-            <pc:sldMk cId="445470335" sldId="256"/>
-            <ac:spMk id="16" creationId="{0C6DF999-13A2-A106-D403-1798A895AC24}"/>
-          </ac:spMkLst>
-        </pc:spChg>
-        <pc:spChg chg="add mod">
-          <ac:chgData name="Fatima Pillosu" userId="a6295d4dc9e22643" providerId="LiveId" clId="{87453732-75AC-4426-B5D3-B7C69C2D4F54}" dt="2025-11-19T15:57:51.048" v="523" actId="1037"/>
+          <ac:chgData name="Fatima Pillosu" userId="a6295d4dc9e22643" providerId="LiveId" clId="{87453732-75AC-4426-B5D3-B7C69C2D4F54}" dt="2026-01-26T15:56:31.064" v="528" actId="21"/>
           <ac:spMkLst>
             <pc:docMk/>
             <pc:sldMk cId="445470335" sldId="256"/>
             <ac:spMk id="17" creationId="{539947CB-ED39-536C-6C0B-2EB551D05FFE}"/>
           </ac:spMkLst>
         </pc:spChg>
-        <pc:spChg chg="add mod">
-          <ac:chgData name="Fatima Pillosu" userId="a6295d4dc9e22643" providerId="LiveId" clId="{87453732-75AC-4426-B5D3-B7C69C2D4F54}" dt="2025-11-19T15:57:51.048" v="523" actId="1037"/>
+        <pc:spChg chg="add del mod">
+          <ac:chgData name="Fatima Pillosu" userId="a6295d4dc9e22643" providerId="LiveId" clId="{87453732-75AC-4426-B5D3-B7C69C2D4F54}" dt="2026-01-26T15:56:31.064" v="528" actId="21"/>
           <ac:spMkLst>
             <pc:docMk/>
             <pc:sldMk cId="445470335" sldId="256"/>
             <ac:spMk id="18" creationId="{D7DE0A7F-FCD3-FD48-0A9C-2B36992C28EF}"/>
           </ac:spMkLst>
         </pc:spChg>
-        <pc:spChg chg="add mod">
-          <ac:chgData name="Fatima Pillosu" userId="a6295d4dc9e22643" providerId="LiveId" clId="{87453732-75AC-4426-B5D3-B7C69C2D4F54}" dt="2025-11-19T16:02:07.822" v="527" actId="20577"/>
+        <pc:spChg chg="add del mod">
+          <ac:chgData name="Fatima Pillosu" userId="a6295d4dc9e22643" providerId="LiveId" clId="{87453732-75AC-4426-B5D3-B7C69C2D4F54}" dt="2026-01-26T15:56:31.064" v="528" actId="21"/>
           <ac:spMkLst>
             <pc:docMk/>
             <pc:sldMk cId="445470335" sldId="256"/>
             <ac:spMk id="19" creationId="{FDD47B8C-923F-C61A-E03C-069006159CDB}"/>
           </ac:spMkLst>
         </pc:spChg>
-        <pc:spChg chg="add mod">
-          <ac:chgData name="Fatima Pillosu" userId="a6295d4dc9e22643" providerId="LiveId" clId="{87453732-75AC-4426-B5D3-B7C69C2D4F54}" dt="2025-11-19T15:58:03.086" v="526" actId="1038"/>
+        <pc:spChg chg="add del mod">
+          <ac:chgData name="Fatima Pillosu" userId="a6295d4dc9e22643" providerId="LiveId" clId="{87453732-75AC-4426-B5D3-B7C69C2D4F54}" dt="2026-01-26T15:56:31.064" v="528" actId="21"/>
           <ac:spMkLst>
             <pc:docMk/>
             <pc:sldMk cId="445470335" sldId="256"/>
             <ac:spMk id="20" creationId="{AF6F7306-7237-ACF1-4BD0-361B5EB6DD34}"/>
           </ac:spMkLst>
         </pc:spChg>
-        <pc:spChg chg="add mod">
-          <ac:chgData name="Fatima Pillosu" userId="a6295d4dc9e22643" providerId="LiveId" clId="{87453732-75AC-4426-B5D3-B7C69C2D4F54}" dt="2025-11-19T15:58:03.086" v="526" actId="1038"/>
+        <pc:spChg chg="add del mod">
+          <ac:chgData name="Fatima Pillosu" userId="a6295d4dc9e22643" providerId="LiveId" clId="{87453732-75AC-4426-B5D3-B7C69C2D4F54}" dt="2026-01-26T15:56:31.064" v="528" actId="21"/>
           <ac:spMkLst>
             <pc:docMk/>
             <pc:sldMk cId="445470335" sldId="256"/>
             <ac:spMk id="22" creationId="{14EFAF95-6DE1-56F0-5604-18B87190C743}"/>
           </ac:spMkLst>
         </pc:spChg>
-        <pc:spChg chg="del">
-          <ac:chgData name="Fatima Pillosu" userId="a6295d4dc9e22643" providerId="LiveId" clId="{87453732-75AC-4426-B5D3-B7C69C2D4F54}" dt="2025-11-19T15:23:00.133" v="3" actId="21"/>
+        <pc:spChg chg="mod">
+          <ac:chgData name="Fatima Pillosu" userId="a6295d4dc9e22643" providerId="LiveId" clId="{87453732-75AC-4426-B5D3-B7C69C2D4F54}" dt="2026-01-26T15:57:26.345" v="534"/>
           <ac:spMkLst>
             <pc:docMk/>
             <pc:sldMk cId="445470335" sldId="256"/>
-            <ac:spMk id="23" creationId="{BE23CF9C-DF5C-B1A7-DEC1-49EAAF70AF55}"/>
+            <ac:spMk id="24" creationId="{14EFAF95-6DE1-56F0-5604-18B87190C743}"/>
           </ac:spMkLst>
         </pc:spChg>
-        <pc:spChg chg="del">
-          <ac:chgData name="Fatima Pillosu" userId="a6295d4dc9e22643" providerId="LiveId" clId="{87453732-75AC-4426-B5D3-B7C69C2D4F54}" dt="2025-11-19T15:22:55.931" v="0" actId="478"/>
+        <pc:spChg chg="mod">
+          <ac:chgData name="Fatima Pillosu" userId="a6295d4dc9e22643" providerId="LiveId" clId="{87453732-75AC-4426-B5D3-B7C69C2D4F54}" dt="2026-01-26T15:57:26.345" v="534"/>
           <ac:spMkLst>
             <pc:docMk/>
             <pc:sldMk cId="445470335" sldId="256"/>
-            <ac:spMk id="24" creationId="{AF56B1E7-4C44-D1B9-1304-A5C1AA2724CB}"/>
+            <ac:spMk id="25" creationId="{F4B0B3BD-E28C-3EA5-DFB4-786F273A8F4D}"/>
           </ac:spMkLst>
         </pc:spChg>
-        <pc:spChg chg="del">
-          <ac:chgData name="Fatima Pillosu" userId="a6295d4dc9e22643" providerId="LiveId" clId="{87453732-75AC-4426-B5D3-B7C69C2D4F54}" dt="2025-11-19T15:23:00.133" v="3" actId="21"/>
+        <pc:spChg chg="add del mod">
+          <ac:chgData name="Fatima Pillosu" userId="a6295d4dc9e22643" providerId="LiveId" clId="{87453732-75AC-4426-B5D3-B7C69C2D4F54}" dt="2026-01-26T16:00:31.845" v="607" actId="21"/>
           <ac:spMkLst>
             <pc:docMk/>
             <pc:sldMk cId="445470335" sldId="256"/>
-            <ac:spMk id="26" creationId="{539947CB-ED39-536C-6C0B-2EB551D05FFE}"/>
+            <ac:spMk id="28" creationId="{755373BA-31C0-2D0F-0B4F-E9754078968B}"/>
           </ac:spMkLst>
         </pc:spChg>
-        <pc:spChg chg="del">
-          <ac:chgData name="Fatima Pillosu" userId="a6295d4dc9e22643" providerId="LiveId" clId="{87453732-75AC-4426-B5D3-B7C69C2D4F54}" dt="2025-11-19T15:23:00.133" v="3" actId="21"/>
+        <pc:spChg chg="add del">
+          <ac:chgData name="Fatima Pillosu" userId="a6295d4dc9e22643" providerId="LiveId" clId="{87453732-75AC-4426-B5D3-B7C69C2D4F54}" dt="2026-01-26T16:00:27.662" v="606" actId="478"/>
           <ac:spMkLst>
             <pc:docMk/>
             <pc:sldMk cId="445470335" sldId="256"/>
-            <ac:spMk id="27" creationId="{8F511433-B364-9A87-DA5F-12F0EE6EB340}"/>
+            <ac:spMk id="29" creationId="{D77AF837-716C-1588-FF6F-23D682027D71}"/>
           </ac:spMkLst>
         </pc:spChg>
-        <pc:spChg chg="del">
-          <ac:chgData name="Fatima Pillosu" userId="a6295d4dc9e22643" providerId="LiveId" clId="{87453732-75AC-4426-B5D3-B7C69C2D4F54}" dt="2025-11-19T15:22:56.998" v="1" actId="478"/>
+        <pc:spChg chg="mod">
+          <ac:chgData name="Fatima Pillosu" userId="a6295d4dc9e22643" providerId="LiveId" clId="{87453732-75AC-4426-B5D3-B7C69C2D4F54}" dt="2026-01-26T16:00:39.488" v="608"/>
           <ac:spMkLst>
             <pc:docMk/>
             <pc:sldMk cId="445470335" sldId="256"/>
-            <ac:spMk id="28" creationId="{9C382BFC-9009-1534-0A11-2C0B9009A230}"/>
+            <ac:spMk id="31" creationId="{539947CB-ED39-536C-6C0B-2EB551D05FFE}"/>
           </ac:spMkLst>
         </pc:spChg>
-        <pc:spChg chg="del">
-          <ac:chgData name="Fatima Pillosu" userId="a6295d4dc9e22643" providerId="LiveId" clId="{87453732-75AC-4426-B5D3-B7C69C2D4F54}" dt="2025-11-19T15:23:00.133" v="3" actId="21"/>
+        <pc:spChg chg="mod">
+          <ac:chgData name="Fatima Pillosu" userId="a6295d4dc9e22643" providerId="LiveId" clId="{87453732-75AC-4426-B5D3-B7C69C2D4F54}" dt="2026-01-26T16:00:39.488" v="608"/>
           <ac:spMkLst>
             <pc:docMk/>
             <pc:sldMk cId="445470335" sldId="256"/>
-            <ac:spMk id="29" creationId="{D7DE0A7F-FCD3-FD48-0A9C-2B36992C28EF}"/>
+            <ac:spMk id="32" creationId="{D7DE0A7F-FCD3-FD48-0A9C-2B36992C28EF}"/>
           </ac:spMkLst>
         </pc:spChg>
-        <pc:spChg chg="del">
-          <ac:chgData name="Fatima Pillosu" userId="a6295d4dc9e22643" providerId="LiveId" clId="{87453732-75AC-4426-B5D3-B7C69C2D4F54}" dt="2025-11-19T15:23:00.133" v="3" actId="21"/>
-          <ac:spMkLst>
-            <pc:docMk/>
-            <pc:sldMk cId="445470335" sldId="256"/>
-            <ac:spMk id="31" creationId="{6601D026-32BE-9F49-EAB4-5732D77734A8}"/>
-          </ac:spMkLst>
-        </pc:spChg>
-        <pc:spChg chg="del">
-          <ac:chgData name="Fatima Pillosu" userId="a6295d4dc9e22643" providerId="LiveId" clId="{87453732-75AC-4426-B5D3-B7C69C2D4F54}" dt="2025-11-19T15:22:57.883" v="2" actId="478"/>
-          <ac:spMkLst>
-            <pc:docMk/>
-            <pc:sldMk cId="445470335" sldId="256"/>
-            <ac:spMk id="32" creationId="{13129964-7EB3-414A-CEE1-9F7124430F79}"/>
-          </ac:spMkLst>
-        </pc:spChg>
-        <pc:spChg chg="del">
-          <ac:chgData name="Fatima Pillosu" userId="a6295d4dc9e22643" providerId="LiveId" clId="{87453732-75AC-4426-B5D3-B7C69C2D4F54}" dt="2025-11-19T15:23:00.133" v="3" actId="21"/>
+        <pc:spChg chg="mod">
+          <ac:chgData name="Fatima Pillosu" userId="a6295d4dc9e22643" providerId="LiveId" clId="{87453732-75AC-4426-B5D3-B7C69C2D4F54}" dt="2026-01-26T16:00:39.488" v="608"/>
           <ac:spMkLst>
             <pc:docMk/>
             <pc:sldMk cId="445470335" sldId="256"/>
             <ac:spMk id="33" creationId="{FDD47B8C-923F-C61A-E03C-069006159CDB}"/>
           </ac:spMkLst>
         </pc:spChg>
-        <pc:spChg chg="add mod">
-          <ac:chgData name="Fatima Pillosu" userId="a6295d4dc9e22643" providerId="LiveId" clId="{87453732-75AC-4426-B5D3-B7C69C2D4F54}" dt="2025-11-19T15:58:03.086" v="526" actId="1038"/>
+        <pc:spChg chg="mod">
+          <ac:chgData name="Fatima Pillosu" userId="a6295d4dc9e22643" providerId="LiveId" clId="{87453732-75AC-4426-B5D3-B7C69C2D4F54}" dt="2026-01-26T16:00:39.488" v="608"/>
+          <ac:spMkLst>
+            <pc:docMk/>
+            <pc:sldMk cId="445470335" sldId="256"/>
+            <ac:spMk id="34" creationId="{AF6F7306-7237-ACF1-4BD0-361B5EB6DD34}"/>
+          </ac:spMkLst>
+        </pc:spChg>
+        <pc:spChg chg="add del mod">
+          <ac:chgData name="Fatima Pillosu" userId="a6295d4dc9e22643" providerId="LiveId" clId="{87453732-75AC-4426-B5D3-B7C69C2D4F54}" dt="2026-01-26T15:56:31.064" v="528" actId="21"/>
           <ac:spMkLst>
             <pc:docMk/>
             <pc:sldMk cId="445470335" sldId="256"/>
             <ac:spMk id="35" creationId="{F4B0B3BD-E28C-3EA5-DFB4-786F273A8F4D}"/>
           </ac:spMkLst>
         </pc:spChg>
-        <pc:picChg chg="add del mod ord">
-          <ac:chgData name="Fatima Pillosu" userId="a6295d4dc9e22643" providerId="LiveId" clId="{87453732-75AC-4426-B5D3-B7C69C2D4F54}" dt="2025-11-19T15:35:57.587" v="267" actId="21"/>
+        <pc:spChg chg="mod">
+          <ac:chgData name="Fatima Pillosu" userId="a6295d4dc9e22643" providerId="LiveId" clId="{87453732-75AC-4426-B5D3-B7C69C2D4F54}" dt="2026-01-26T16:00:39.488" v="608"/>
+          <ac:spMkLst>
+            <pc:docMk/>
+            <pc:sldMk cId="445470335" sldId="256"/>
+            <ac:spMk id="39" creationId="{14EFAF95-6DE1-56F0-5604-18B87190C743}"/>
+          </ac:spMkLst>
+        </pc:spChg>
+        <pc:spChg chg="mod">
+          <ac:chgData name="Fatima Pillosu" userId="a6295d4dc9e22643" providerId="LiveId" clId="{87453732-75AC-4426-B5D3-B7C69C2D4F54}" dt="2026-01-26T16:00:39.488" v="608"/>
+          <ac:spMkLst>
+            <pc:docMk/>
+            <pc:sldMk cId="445470335" sldId="256"/>
+            <ac:spMk id="40" creationId="{F4B0B3BD-E28C-3EA5-DFB4-786F273A8F4D}"/>
+          </ac:spMkLst>
+        </pc:spChg>
+        <pc:spChg chg="add mod">
+          <ac:chgData name="Fatima Pillosu" userId="a6295d4dc9e22643" providerId="LiveId" clId="{87453732-75AC-4426-B5D3-B7C69C2D4F54}" dt="2026-01-26T16:00:39.488" v="608"/>
+          <ac:spMkLst>
+            <pc:docMk/>
+            <pc:sldMk cId="445470335" sldId="256"/>
+            <ac:spMk id="43" creationId="{755373BA-31C0-2D0F-0B4F-E9754078968B}"/>
+          </ac:spMkLst>
+        </pc:spChg>
+        <pc:grpChg chg="add del mod">
+          <ac:chgData name="Fatima Pillosu" userId="a6295d4dc9e22643" providerId="LiveId" clId="{87453732-75AC-4426-B5D3-B7C69C2D4F54}" dt="2026-01-26T15:57:16.707" v="533" actId="21"/>
+          <ac:grpSpMkLst>
+            <pc:docMk/>
+            <pc:sldMk cId="445470335" sldId="256"/>
+            <ac:grpSpMk id="11" creationId="{E90E6E01-8CF5-4E96-8B34-4501EF00DCBA}"/>
+          </ac:grpSpMkLst>
+        </pc:grpChg>
+        <pc:grpChg chg="add del mod">
+          <ac:chgData name="Fatima Pillosu" userId="a6295d4dc9e22643" providerId="LiveId" clId="{87453732-75AC-4426-B5D3-B7C69C2D4F54}" dt="2026-01-26T16:00:31.845" v="607" actId="21"/>
+          <ac:grpSpMkLst>
+            <pc:docMk/>
+            <pc:sldMk cId="445470335" sldId="256"/>
+            <ac:grpSpMk id="12" creationId="{E90E6E01-8CF5-4E96-8B34-4501EF00DCBA}"/>
+          </ac:grpSpMkLst>
+        </pc:grpChg>
+        <pc:grpChg chg="mod">
+          <ac:chgData name="Fatima Pillosu" userId="a6295d4dc9e22643" providerId="LiveId" clId="{87453732-75AC-4426-B5D3-B7C69C2D4F54}" dt="2026-01-26T16:00:45.763" v="614" actId="1035"/>
+          <ac:grpSpMkLst>
+            <pc:docMk/>
+            <pc:sldMk cId="445470335" sldId="256"/>
+            <ac:grpSpMk id="30" creationId="{E90E6E01-8CF5-4E96-8B34-4501EF00DCBA}"/>
+          </ac:grpSpMkLst>
+        </pc:grpChg>
+        <pc:picChg chg="add mod">
+          <ac:chgData name="Fatima Pillosu" userId="a6295d4dc9e22643" providerId="LiveId" clId="{87453732-75AC-4426-B5D3-B7C69C2D4F54}" dt="2026-01-26T15:57:08.392" v="531" actId="164"/>
           <ac:picMkLst>
             <pc:docMk/>
             <pc:sldMk cId="445470335" sldId="256"/>
-            <ac:picMk id="3" creationId="{3C84D770-A2A7-7A68-64A2-76AC8DEA743A}"/>
+            <ac:picMk id="6" creationId="{2E65243E-E0E5-70E1-BD42-77525EC94B42}"/>
           </ac:picMkLst>
         </pc:picChg>
-        <pc:picChg chg="add del mod ord">
-          <ac:chgData name="Fatima Pillosu" userId="a6295d4dc9e22643" providerId="LiveId" clId="{87453732-75AC-4426-B5D3-B7C69C2D4F54}" dt="2025-11-19T15:35:57.587" v="267" actId="21"/>
+        <pc:picChg chg="add mod">
+          <ac:chgData name="Fatima Pillosu" userId="a6295d4dc9e22643" providerId="LiveId" clId="{87453732-75AC-4426-B5D3-B7C69C2D4F54}" dt="2026-01-26T15:57:08.392" v="531" actId="164"/>
           <ac:picMkLst>
             <pc:docMk/>
             <pc:sldMk cId="445470335" sldId="256"/>
-            <ac:picMk id="7" creationId="{CAE3763B-0C01-2DF0-2543-B1907A30238C}"/>
+            <ac:picMk id="9" creationId="{3C84D770-A2A7-7A68-64A2-76AC8DEA743A}"/>
           </ac:picMkLst>
         </pc:picChg>
-        <pc:picChg chg="add del mod ord">
-          <ac:chgData name="Fatima Pillosu" userId="a6295d4dc9e22643" providerId="LiveId" clId="{87453732-75AC-4426-B5D3-B7C69C2D4F54}" dt="2025-11-19T15:35:57.587" v="267" actId="21"/>
+        <pc:picChg chg="add mod">
+          <ac:chgData name="Fatima Pillosu" userId="a6295d4dc9e22643" providerId="LiveId" clId="{87453732-75AC-4426-B5D3-B7C69C2D4F54}" dt="2026-01-26T15:57:08.392" v="531" actId="164"/>
           <ac:picMkLst>
             <pc:docMk/>
             <pc:sldMk cId="445470335" sldId="256"/>
-            <ac:picMk id="10" creationId="{2E65243E-E0E5-70E1-BD42-77525EC94B42}"/>
+            <ac:picMk id="10" creationId="{CAE3763B-0C01-2DF0-2543-B1907A30238C}"/>
           </ac:picMkLst>
         </pc:picChg>
         <pc:picChg chg="add del mod">
-          <ac:chgData name="Fatima Pillosu" userId="a6295d4dc9e22643" providerId="LiveId" clId="{87453732-75AC-4426-B5D3-B7C69C2D4F54}" dt="2025-11-19T15:35:34.368" v="264" actId="478"/>
-          <ac:picMkLst>
-            <pc:docMk/>
-            <pc:sldMk cId="445470335" sldId="256"/>
-            <ac:picMk id="15" creationId="{91070146-940B-0334-A5BF-6665024E9DE9}"/>
-          </ac:picMkLst>
-        </pc:picChg>
-        <pc:picChg chg="add mod">
-          <ac:chgData name="Fatima Pillosu" userId="a6295d4dc9e22643" providerId="LiveId" clId="{87453732-75AC-4426-B5D3-B7C69C2D4F54}" dt="2025-11-19T15:58:03.086" v="526" actId="1038"/>
+          <ac:chgData name="Fatima Pillosu" userId="a6295d4dc9e22643" providerId="LiveId" clId="{87453732-75AC-4426-B5D3-B7C69C2D4F54}" dt="2026-01-26T15:56:31.064" v="528" actId="21"/>
           <ac:picMkLst>
             <pc:docMk/>
             <pc:sldMk cId="445470335" sldId="256"/>
             <ac:picMk id="21" creationId="{2E65243E-E0E5-70E1-BD42-77525EC94B42}"/>
           </ac:picMkLst>
         </pc:picChg>
-        <pc:picChg chg="del">
-          <ac:chgData name="Fatima Pillosu" userId="a6295d4dc9e22643" providerId="LiveId" clId="{87453732-75AC-4426-B5D3-B7C69C2D4F54}" dt="2025-11-19T15:23:00.133" v="3" actId="21"/>
+        <pc:picChg chg="mod">
+          <ac:chgData name="Fatima Pillosu" userId="a6295d4dc9e22643" providerId="LiveId" clId="{87453732-75AC-4426-B5D3-B7C69C2D4F54}" dt="2026-01-26T15:57:26.345" v="534"/>
           <ac:picMkLst>
             <pc:docMk/>
             <pc:sldMk cId="445470335" sldId="256"/>
-            <ac:picMk id="25" creationId="{3C84D770-A2A7-7A68-64A2-76AC8DEA743A}"/>
+            <ac:picMk id="23" creationId="{2E65243E-E0E5-70E1-BD42-77525EC94B42}"/>
           </ac:picMkLst>
         </pc:picChg>
-        <pc:picChg chg="del">
-          <ac:chgData name="Fatima Pillosu" userId="a6295d4dc9e22643" providerId="LiveId" clId="{87453732-75AC-4426-B5D3-B7C69C2D4F54}" dt="2025-11-19T15:23:00.133" v="3" actId="21"/>
+        <pc:picChg chg="mod">
+          <ac:chgData name="Fatima Pillosu" userId="a6295d4dc9e22643" providerId="LiveId" clId="{87453732-75AC-4426-B5D3-B7C69C2D4F54}" dt="2026-01-26T15:57:26.345" v="534"/>
           <ac:picMkLst>
             <pc:docMk/>
             <pc:sldMk cId="445470335" sldId="256"/>
-            <ac:picMk id="30" creationId="{CAE3763B-0C01-2DF0-2543-B1907A30238C}"/>
+            <ac:picMk id="26" creationId="{3C84D770-A2A7-7A68-64A2-76AC8DEA743A}"/>
           </ac:picMkLst>
         </pc:picChg>
-        <pc:picChg chg="del">
-          <ac:chgData name="Fatima Pillosu" userId="a6295d4dc9e22643" providerId="LiveId" clId="{87453732-75AC-4426-B5D3-B7C69C2D4F54}" dt="2025-11-19T15:23:00.133" v="3" actId="21"/>
+        <pc:picChg chg="mod">
+          <ac:chgData name="Fatima Pillosu" userId="a6295d4dc9e22643" providerId="LiveId" clId="{87453732-75AC-4426-B5D3-B7C69C2D4F54}" dt="2026-01-26T15:57:26.345" v="534"/>
           <ac:picMkLst>
             <pc:docMk/>
             <pc:sldMk cId="445470335" sldId="256"/>
-            <ac:picMk id="34" creationId="{2E65243E-E0E5-70E1-BD42-77525EC94B42}"/>
+            <ac:picMk id="27" creationId="{CAE3763B-0C01-2DF0-2543-B1907A30238C}"/>
           </ac:picMkLst>
         </pc:picChg>
-        <pc:picChg chg="add mod">
-          <ac:chgData name="Fatima Pillosu" userId="a6295d4dc9e22643" providerId="LiveId" clId="{87453732-75AC-4426-B5D3-B7C69C2D4F54}" dt="2025-11-19T15:58:03.086" v="526" actId="1038"/>
+        <pc:picChg chg="add del mod">
+          <ac:chgData name="Fatima Pillosu" userId="a6295d4dc9e22643" providerId="LiveId" clId="{87453732-75AC-4426-B5D3-B7C69C2D4F54}" dt="2026-01-26T15:56:31.064" v="528" actId="21"/>
           <ac:picMkLst>
             <pc:docMk/>
             <pc:sldMk cId="445470335" sldId="256"/>
             <ac:picMk id="36" creationId="{3C84D770-A2A7-7A68-64A2-76AC8DEA743A}"/>
           </ac:picMkLst>
         </pc:picChg>
-        <pc:picChg chg="add mod">
-          <ac:chgData name="Fatima Pillosu" userId="a6295d4dc9e22643" providerId="LiveId" clId="{87453732-75AC-4426-B5D3-B7C69C2D4F54}" dt="2025-11-19T15:58:03.086" v="526" actId="1038"/>
+        <pc:picChg chg="add del mod">
+          <ac:chgData name="Fatima Pillosu" userId="a6295d4dc9e22643" providerId="LiveId" clId="{87453732-75AC-4426-B5D3-B7C69C2D4F54}" dt="2026-01-26T15:56:31.064" v="528" actId="21"/>
           <ac:picMkLst>
             <pc:docMk/>
             <pc:sldMk cId="445470335" sldId="256"/>
             <ac:picMk id="37" creationId="{CAE3763B-0C01-2DF0-2543-B1907A30238C}"/>
+          </ac:picMkLst>
+        </pc:picChg>
+        <pc:picChg chg="mod">
+          <ac:chgData name="Fatima Pillosu" userId="a6295d4dc9e22643" providerId="LiveId" clId="{87453732-75AC-4426-B5D3-B7C69C2D4F54}" dt="2026-01-26T16:00:39.488" v="608"/>
+          <ac:picMkLst>
+            <pc:docMk/>
+            <pc:sldMk cId="445470335" sldId="256"/>
+            <ac:picMk id="38" creationId="{2E65243E-E0E5-70E1-BD42-77525EC94B42}"/>
+          </ac:picMkLst>
+        </pc:picChg>
+        <pc:picChg chg="mod">
+          <ac:chgData name="Fatima Pillosu" userId="a6295d4dc9e22643" providerId="LiveId" clId="{87453732-75AC-4426-B5D3-B7C69C2D4F54}" dt="2026-01-26T16:00:39.488" v="608"/>
+          <ac:picMkLst>
+            <pc:docMk/>
+            <pc:sldMk cId="445470335" sldId="256"/>
+            <ac:picMk id="41" creationId="{3C84D770-A2A7-7A68-64A2-76AC8DEA743A}"/>
+          </ac:picMkLst>
+        </pc:picChg>
+        <pc:picChg chg="mod">
+          <ac:chgData name="Fatima Pillosu" userId="a6295d4dc9e22643" providerId="LiveId" clId="{87453732-75AC-4426-B5D3-B7C69C2D4F54}" dt="2026-01-26T16:00:39.488" v="608"/>
+          <ac:picMkLst>
+            <pc:docMk/>
+            <pc:sldMk cId="445470335" sldId="256"/>
+            <ac:picMk id="42" creationId="{CAE3763B-0C01-2DF0-2543-B1907A30238C}"/>
           </ac:picMkLst>
         </pc:picChg>
       </pc:sldChg>
@@ -506,7 +562,7 @@
           <a:p>
             <a:fld id="{F52550A0-474C-420B-A2D7-93745FDCC2EA}" type="datetimeFigureOut">
               <a:rPr lang="it-IT" smtClean="0"/>
-              <a:t>19/11/2025</a:t>
+              <a:t>26/01/2026</a:t>
             </a:fld>
             <a:endParaRPr lang="it-IT"/>
           </a:p>
@@ -524,8 +580,8 @@
         </p:nvSpPr>
         <p:spPr>
           <a:xfrm>
-            <a:off x="762000" y="1143000"/>
-            <a:ext cx="5334000" cy="3086100"/>
+            <a:off x="369888" y="1143000"/>
+            <a:ext cx="6118225" cy="3086100"/>
           </a:xfrm>
           <a:prstGeom prst="rect">
             <a:avLst/>
@@ -801,7 +857,12 @@
             <p:ph type="sldImg"/>
           </p:nvPr>
         </p:nvSpPr>
-        <p:spPr/>
+        <p:spPr>
+          <a:xfrm>
+            <a:off x="369888" y="1143000"/>
+            <a:ext cx="6118225" cy="3086100"/>
+          </a:xfrm>
+        </p:spPr>
       </p:sp>
       <p:sp>
         <p:nvSpPr>
@@ -887,15 +948,15 @@
         </p:nvSpPr>
         <p:spPr>
           <a:xfrm>
-            <a:off x="373460" y="282929"/>
-            <a:ext cx="2240756" cy="601874"/>
+            <a:off x="517525" y="341645"/>
+            <a:ext cx="3105150" cy="726781"/>
           </a:xfrm>
         </p:spPr>
         <p:txBody>
           <a:bodyPr anchor="b"/>
           <a:lstStyle>
             <a:lvl1pPr algn="ctr">
-              <a:defRPr sz="1471"/>
+              <a:defRPr sz="1826"/>
             </a:lvl1pPr>
           </a:lstStyle>
           <a:p>
@@ -919,8 +980,8 @@
         </p:nvSpPr>
         <p:spPr>
           <a:xfrm>
-            <a:off x="373460" y="908014"/>
-            <a:ext cx="2240756" cy="417390"/>
+            <a:off x="517525" y="1096454"/>
+            <a:ext cx="3105150" cy="504011"/>
           </a:xfrm>
         </p:spPr>
         <p:txBody>
@@ -928,39 +989,39 @@
           <a:lstStyle>
             <a:lvl1pPr marL="0" indent="0" algn="ctr">
               <a:buNone/>
-              <a:defRPr sz="588"/>
+              <a:defRPr sz="731"/>
             </a:lvl1pPr>
-            <a:lvl2pPr marL="112060" indent="0" algn="ctr">
-              <a:buNone/>
-              <a:defRPr sz="490"/>
+            <a:lvl2pPr marL="139172" indent="0" algn="ctr">
+              <a:buNone/>
+              <a:defRPr sz="609"/>
             </a:lvl2pPr>
-            <a:lvl3pPr marL="224119" indent="0" algn="ctr">
-              <a:buNone/>
-              <a:defRPr sz="441"/>
+            <a:lvl3pPr marL="278343" indent="0" algn="ctr">
+              <a:buNone/>
+              <a:defRPr sz="548"/>
             </a:lvl3pPr>
-            <a:lvl4pPr marL="336179" indent="0" algn="ctr">
-              <a:buNone/>
-              <a:defRPr sz="392"/>
+            <a:lvl4pPr marL="417515" indent="0" algn="ctr">
+              <a:buNone/>
+              <a:defRPr sz="487"/>
             </a:lvl4pPr>
-            <a:lvl5pPr marL="448239" indent="0" algn="ctr">
-              <a:buNone/>
-              <a:defRPr sz="392"/>
+            <a:lvl5pPr marL="556687" indent="0" algn="ctr">
+              <a:buNone/>
+              <a:defRPr sz="487"/>
             </a:lvl5pPr>
-            <a:lvl6pPr marL="560299" indent="0" algn="ctr">
-              <a:buNone/>
-              <a:defRPr sz="392"/>
+            <a:lvl6pPr marL="695858" indent="0" algn="ctr">
+              <a:buNone/>
+              <a:defRPr sz="487"/>
             </a:lvl6pPr>
-            <a:lvl7pPr marL="672358" indent="0" algn="ctr">
-              <a:buNone/>
-              <a:defRPr sz="392"/>
+            <a:lvl7pPr marL="835030" indent="0" algn="ctr">
+              <a:buNone/>
+              <a:defRPr sz="487"/>
             </a:lvl7pPr>
-            <a:lvl8pPr marL="784418" indent="0" algn="ctr">
-              <a:buNone/>
-              <a:defRPr sz="392"/>
+            <a:lvl8pPr marL="974202" indent="0" algn="ctr">
+              <a:buNone/>
+              <a:defRPr sz="487"/>
             </a:lvl8pPr>
-            <a:lvl9pPr marL="896478" indent="0" algn="ctr">
-              <a:buNone/>
-              <a:defRPr sz="392"/>
+            <a:lvl9pPr marL="1113373" indent="0" algn="ctr">
+              <a:buNone/>
+              <a:defRPr sz="487"/>
             </a:lvl9pPr>
           </a:lstStyle>
           <a:p>
@@ -989,7 +1050,7 @@
           <a:p>
             <a:fld id="{BD991D17-A80B-440D-B07A-8FE6A2A163B8}" type="datetimeFigureOut">
               <a:rPr lang="it-IT" smtClean="0"/>
-              <a:t>19/11/2025</a:t>
+              <a:t>26/01/2026</a:t>
             </a:fld>
             <a:endParaRPr lang="it-IT"/>
           </a:p>
@@ -1040,7 +1101,7 @@
     </p:spTree>
     <p:extLst>
       <p:ext uri="{BB962C8B-B14F-4D97-AF65-F5344CB8AC3E}">
-        <p14:creationId xmlns:p14="http://schemas.microsoft.com/office/powerpoint/2010/main" val="614417394"/>
+        <p14:creationId xmlns:p14="http://schemas.microsoft.com/office/powerpoint/2010/main" val="617586659"/>
       </p:ext>
     </p:extLst>
   </p:cSld>
@@ -1159,7 +1220,7 @@
           <a:p>
             <a:fld id="{BD991D17-A80B-440D-B07A-8FE6A2A163B8}" type="datetimeFigureOut">
               <a:rPr lang="it-IT" smtClean="0"/>
-              <a:t>19/11/2025</a:t>
+              <a:t>26/01/2026</a:t>
             </a:fld>
             <a:endParaRPr lang="it-IT"/>
           </a:p>
@@ -1210,7 +1271,7 @@
     </p:spTree>
     <p:extLst>
       <p:ext uri="{BB962C8B-B14F-4D97-AF65-F5344CB8AC3E}">
-        <p14:creationId xmlns:p14="http://schemas.microsoft.com/office/powerpoint/2010/main" val="3823172072"/>
+        <p14:creationId xmlns:p14="http://schemas.microsoft.com/office/powerpoint/2010/main" val="3445762054"/>
       </p:ext>
     </p:extLst>
   </p:cSld>
@@ -1249,8 +1310,8 @@
         </p:nvSpPr>
         <p:spPr>
           <a:xfrm>
-            <a:off x="2138055" y="92042"/>
-            <a:ext cx="644217" cy="1465068"/>
+            <a:off x="2962830" y="111143"/>
+            <a:ext cx="892731" cy="1769113"/>
           </a:xfrm>
         </p:spPr>
         <p:txBody>
@@ -1277,8 +1338,8 @@
         </p:nvSpPr>
         <p:spPr>
           <a:xfrm>
-            <a:off x="205403" y="92042"/>
-            <a:ext cx="1895306" cy="1465068"/>
+            <a:off x="284639" y="111143"/>
+            <a:ext cx="2626439" cy="1769113"/>
           </a:xfrm>
         </p:spPr>
         <p:txBody>
@@ -1339,7 +1400,7 @@
           <a:p>
             <a:fld id="{BD991D17-A80B-440D-B07A-8FE6A2A163B8}" type="datetimeFigureOut">
               <a:rPr lang="it-IT" smtClean="0"/>
-              <a:t>19/11/2025</a:t>
+              <a:t>26/01/2026</a:t>
             </a:fld>
             <a:endParaRPr lang="it-IT"/>
           </a:p>
@@ -1390,7 +1451,7 @@
     </p:spTree>
     <p:extLst>
       <p:ext uri="{BB962C8B-B14F-4D97-AF65-F5344CB8AC3E}">
-        <p14:creationId xmlns:p14="http://schemas.microsoft.com/office/powerpoint/2010/main" val="3441742391"/>
+        <p14:creationId xmlns:p14="http://schemas.microsoft.com/office/powerpoint/2010/main" val="1369702928"/>
       </p:ext>
     </p:extLst>
   </p:cSld>
@@ -1509,7 +1570,7 @@
           <a:p>
             <a:fld id="{BD991D17-A80B-440D-B07A-8FE6A2A163B8}" type="datetimeFigureOut">
               <a:rPr lang="it-IT" smtClean="0"/>
-              <a:t>19/11/2025</a:t>
+              <a:t>26/01/2026</a:t>
             </a:fld>
             <a:endParaRPr lang="it-IT"/>
           </a:p>
@@ -1560,7 +1621,7 @@
     </p:spTree>
     <p:extLst>
       <p:ext uri="{BB962C8B-B14F-4D97-AF65-F5344CB8AC3E}">
-        <p14:creationId xmlns:p14="http://schemas.microsoft.com/office/powerpoint/2010/main" val="606325127"/>
+        <p14:creationId xmlns:p14="http://schemas.microsoft.com/office/powerpoint/2010/main" val="2368323708"/>
       </p:ext>
     </p:extLst>
   </p:cSld>
@@ -1599,15 +1660,15 @@
         </p:nvSpPr>
         <p:spPr>
           <a:xfrm>
-            <a:off x="203846" y="430997"/>
-            <a:ext cx="2576870" cy="719128"/>
+            <a:off x="282482" y="520441"/>
+            <a:ext cx="3570923" cy="868368"/>
           </a:xfrm>
         </p:spPr>
         <p:txBody>
           <a:bodyPr anchor="b"/>
           <a:lstStyle>
             <a:lvl1pPr>
-              <a:defRPr sz="1471"/>
+              <a:defRPr sz="1826"/>
             </a:lvl1pPr>
           </a:lstStyle>
           <a:p>
@@ -1631,8 +1692,8 @@
         </p:nvSpPr>
         <p:spPr>
           <a:xfrm>
-            <a:off x="203846" y="1156928"/>
-            <a:ext cx="2576870" cy="378172"/>
+            <a:off x="282482" y="1397025"/>
+            <a:ext cx="3570923" cy="456654"/>
           </a:xfrm>
         </p:spPr>
         <p:txBody>
@@ -1640,7 +1701,7 @@
           <a:lstStyle>
             <a:lvl1pPr marL="0" indent="0">
               <a:buNone/>
-              <a:defRPr sz="588">
+              <a:defRPr sz="731">
                 <a:solidFill>
                   <a:schemeClr val="tx1">
                     <a:tint val="82000"/>
@@ -1648,9 +1709,9 @@
                 </a:solidFill>
               </a:defRPr>
             </a:lvl1pPr>
-            <a:lvl2pPr marL="112060" indent="0">
-              <a:buNone/>
-              <a:defRPr sz="490">
+            <a:lvl2pPr marL="139172" indent="0">
+              <a:buNone/>
+              <a:defRPr sz="609">
                 <a:solidFill>
                   <a:schemeClr val="tx1">
                     <a:tint val="82000"/>
@@ -1658,9 +1719,9 @@
                 </a:solidFill>
               </a:defRPr>
             </a:lvl2pPr>
-            <a:lvl3pPr marL="224119" indent="0">
-              <a:buNone/>
-              <a:defRPr sz="441">
+            <a:lvl3pPr marL="278343" indent="0">
+              <a:buNone/>
+              <a:defRPr sz="548">
                 <a:solidFill>
                   <a:schemeClr val="tx1">
                     <a:tint val="82000"/>
@@ -1668,9 +1729,9 @@
                 </a:solidFill>
               </a:defRPr>
             </a:lvl3pPr>
-            <a:lvl4pPr marL="336179" indent="0">
-              <a:buNone/>
-              <a:defRPr sz="392">
+            <a:lvl4pPr marL="417515" indent="0">
+              <a:buNone/>
+              <a:defRPr sz="487">
                 <a:solidFill>
                   <a:schemeClr val="tx1">
                     <a:tint val="82000"/>
@@ -1678,9 +1739,9 @@
                 </a:solidFill>
               </a:defRPr>
             </a:lvl4pPr>
-            <a:lvl5pPr marL="448239" indent="0">
-              <a:buNone/>
-              <a:defRPr sz="392">
+            <a:lvl5pPr marL="556687" indent="0">
+              <a:buNone/>
+              <a:defRPr sz="487">
                 <a:solidFill>
                   <a:schemeClr val="tx1">
                     <a:tint val="82000"/>
@@ -1688,9 +1749,9 @@
                 </a:solidFill>
               </a:defRPr>
             </a:lvl5pPr>
-            <a:lvl6pPr marL="560299" indent="0">
-              <a:buNone/>
-              <a:defRPr sz="392">
+            <a:lvl6pPr marL="695858" indent="0">
+              <a:buNone/>
+              <a:defRPr sz="487">
                 <a:solidFill>
                   <a:schemeClr val="tx1">
                     <a:tint val="82000"/>
@@ -1698,9 +1759,9 @@
                 </a:solidFill>
               </a:defRPr>
             </a:lvl6pPr>
-            <a:lvl7pPr marL="672358" indent="0">
-              <a:buNone/>
-              <a:defRPr sz="392">
+            <a:lvl7pPr marL="835030" indent="0">
+              <a:buNone/>
+              <a:defRPr sz="487">
                 <a:solidFill>
                   <a:schemeClr val="tx1">
                     <a:tint val="82000"/>
@@ -1708,9 +1769,9 @@
                 </a:solidFill>
               </a:defRPr>
             </a:lvl7pPr>
-            <a:lvl8pPr marL="784418" indent="0">
-              <a:buNone/>
-              <a:defRPr sz="392">
+            <a:lvl8pPr marL="974202" indent="0">
+              <a:buNone/>
+              <a:defRPr sz="487">
                 <a:solidFill>
                   <a:schemeClr val="tx1">
                     <a:tint val="82000"/>
@@ -1718,9 +1779,9 @@
                 </a:solidFill>
               </a:defRPr>
             </a:lvl8pPr>
-            <a:lvl9pPr marL="896478" indent="0">
-              <a:buNone/>
-              <a:defRPr sz="392">
+            <a:lvl9pPr marL="1113373" indent="0">
+              <a:buNone/>
+              <a:defRPr sz="487">
                 <a:solidFill>
                   <a:schemeClr val="tx1">
                     <a:tint val="82000"/>
@@ -1755,7 +1816,7 @@
           <a:p>
             <a:fld id="{BD991D17-A80B-440D-B07A-8FE6A2A163B8}" type="datetimeFigureOut">
               <a:rPr lang="it-IT" smtClean="0"/>
-              <a:t>19/11/2025</a:t>
+              <a:t>26/01/2026</a:t>
             </a:fld>
             <a:endParaRPr lang="it-IT"/>
           </a:p>
@@ -1806,7 +1867,7 @@
     </p:spTree>
     <p:extLst>
       <p:ext uri="{BB962C8B-B14F-4D97-AF65-F5344CB8AC3E}">
-        <p14:creationId xmlns:p14="http://schemas.microsoft.com/office/powerpoint/2010/main" val="1036609364"/>
+        <p14:creationId xmlns:p14="http://schemas.microsoft.com/office/powerpoint/2010/main" val="4017970509"/>
       </p:ext>
     </p:extLst>
   </p:cSld>
@@ -1868,8 +1929,8 @@
         </p:nvSpPr>
         <p:spPr>
           <a:xfrm>
-            <a:off x="205403" y="460210"/>
-            <a:ext cx="1269762" cy="1096900"/>
+            <a:off x="284639" y="555717"/>
+            <a:ext cx="1759585" cy="1324540"/>
           </a:xfrm>
         </p:spPr>
         <p:txBody>
@@ -1925,8 +1986,8 @@
         </p:nvSpPr>
         <p:spPr>
           <a:xfrm>
-            <a:off x="1512510" y="460210"/>
-            <a:ext cx="1269762" cy="1096900"/>
+            <a:off x="2095976" y="555717"/>
+            <a:ext cx="1759585" cy="1324540"/>
           </a:xfrm>
         </p:spPr>
         <p:txBody>
@@ -1987,7 +2048,7 @@
           <a:p>
             <a:fld id="{BD991D17-A80B-440D-B07A-8FE6A2A163B8}" type="datetimeFigureOut">
               <a:rPr lang="it-IT" smtClean="0"/>
-              <a:t>19/11/2025</a:t>
+              <a:t>26/01/2026</a:t>
             </a:fld>
             <a:endParaRPr lang="it-IT"/>
           </a:p>
@@ -2038,7 +2099,7 @@
     </p:spTree>
     <p:extLst>
       <p:ext uri="{BB962C8B-B14F-4D97-AF65-F5344CB8AC3E}">
-        <p14:creationId xmlns:p14="http://schemas.microsoft.com/office/powerpoint/2010/main" val="1905851033"/>
+        <p14:creationId xmlns:p14="http://schemas.microsoft.com/office/powerpoint/2010/main" val="3933140421"/>
       </p:ext>
     </p:extLst>
   </p:cSld>
@@ -2077,8 +2138,8 @@
         </p:nvSpPr>
         <p:spPr>
           <a:xfrm>
-            <a:off x="205792" y="92042"/>
-            <a:ext cx="2576870" cy="334152"/>
+            <a:off x="285178" y="111144"/>
+            <a:ext cx="3570923" cy="403499"/>
           </a:xfrm>
         </p:spPr>
         <p:txBody>
@@ -2105,8 +2166,8 @@
         </p:nvSpPr>
         <p:spPr>
           <a:xfrm>
-            <a:off x="205792" y="423793"/>
-            <a:ext cx="1263926" cy="207695"/>
+            <a:off x="285178" y="511743"/>
+            <a:ext cx="1751499" cy="250797"/>
           </a:xfrm>
         </p:spPr>
         <p:txBody>
@@ -2114,39 +2175,39 @@
           <a:lstStyle>
             <a:lvl1pPr marL="0" indent="0">
               <a:buNone/>
-              <a:defRPr sz="588" b="1"/>
+              <a:defRPr sz="731" b="1"/>
             </a:lvl1pPr>
-            <a:lvl2pPr marL="112060" indent="0">
-              <a:buNone/>
-              <a:defRPr sz="490" b="1"/>
+            <a:lvl2pPr marL="139172" indent="0">
+              <a:buNone/>
+              <a:defRPr sz="609" b="1"/>
             </a:lvl2pPr>
-            <a:lvl3pPr marL="224119" indent="0">
-              <a:buNone/>
-              <a:defRPr sz="441" b="1"/>
+            <a:lvl3pPr marL="278343" indent="0">
+              <a:buNone/>
+              <a:defRPr sz="548" b="1"/>
             </a:lvl3pPr>
-            <a:lvl4pPr marL="336179" indent="0">
-              <a:buNone/>
-              <a:defRPr sz="392" b="1"/>
+            <a:lvl4pPr marL="417515" indent="0">
+              <a:buNone/>
+              <a:defRPr sz="487" b="1"/>
             </a:lvl4pPr>
-            <a:lvl5pPr marL="448239" indent="0">
-              <a:buNone/>
-              <a:defRPr sz="392" b="1"/>
+            <a:lvl5pPr marL="556687" indent="0">
+              <a:buNone/>
+              <a:defRPr sz="487" b="1"/>
             </a:lvl5pPr>
-            <a:lvl6pPr marL="560299" indent="0">
-              <a:buNone/>
-              <a:defRPr sz="392" b="1"/>
+            <a:lvl6pPr marL="695858" indent="0">
+              <a:buNone/>
+              <a:defRPr sz="487" b="1"/>
             </a:lvl6pPr>
-            <a:lvl7pPr marL="672358" indent="0">
-              <a:buNone/>
-              <a:defRPr sz="392" b="1"/>
+            <a:lvl7pPr marL="835030" indent="0">
+              <a:buNone/>
+              <a:defRPr sz="487" b="1"/>
             </a:lvl7pPr>
-            <a:lvl8pPr marL="784418" indent="0">
-              <a:buNone/>
-              <a:defRPr sz="392" b="1"/>
+            <a:lvl8pPr marL="974202" indent="0">
+              <a:buNone/>
+              <a:defRPr sz="487" b="1"/>
             </a:lvl8pPr>
-            <a:lvl9pPr marL="896478" indent="0">
-              <a:buNone/>
-              <a:defRPr sz="392" b="1"/>
+            <a:lvl9pPr marL="1113373" indent="0">
+              <a:buNone/>
+              <a:defRPr sz="487" b="1"/>
             </a:lvl9pPr>
           </a:lstStyle>
           <a:p>
@@ -2170,8 +2231,8 @@
         </p:nvSpPr>
         <p:spPr>
           <a:xfrm>
-            <a:off x="205792" y="631488"/>
-            <a:ext cx="1263926" cy="928823"/>
+            <a:off x="285178" y="762540"/>
+            <a:ext cx="1751499" cy="1121582"/>
           </a:xfrm>
         </p:spPr>
         <p:txBody>
@@ -2227,8 +2288,8 @@
         </p:nvSpPr>
         <p:spPr>
           <a:xfrm>
-            <a:off x="1512510" y="423793"/>
-            <a:ext cx="1270151" cy="207695"/>
+            <a:off x="2095976" y="511743"/>
+            <a:ext cx="1760124" cy="250797"/>
           </a:xfrm>
         </p:spPr>
         <p:txBody>
@@ -2236,39 +2297,39 @@
           <a:lstStyle>
             <a:lvl1pPr marL="0" indent="0">
               <a:buNone/>
-              <a:defRPr sz="588" b="1"/>
+              <a:defRPr sz="731" b="1"/>
             </a:lvl1pPr>
-            <a:lvl2pPr marL="112060" indent="0">
-              <a:buNone/>
-              <a:defRPr sz="490" b="1"/>
+            <a:lvl2pPr marL="139172" indent="0">
+              <a:buNone/>
+              <a:defRPr sz="609" b="1"/>
             </a:lvl2pPr>
-            <a:lvl3pPr marL="224119" indent="0">
-              <a:buNone/>
-              <a:defRPr sz="441" b="1"/>
+            <a:lvl3pPr marL="278343" indent="0">
+              <a:buNone/>
+              <a:defRPr sz="548" b="1"/>
             </a:lvl3pPr>
-            <a:lvl4pPr marL="336179" indent="0">
-              <a:buNone/>
-              <a:defRPr sz="392" b="1"/>
+            <a:lvl4pPr marL="417515" indent="0">
+              <a:buNone/>
+              <a:defRPr sz="487" b="1"/>
             </a:lvl4pPr>
-            <a:lvl5pPr marL="448239" indent="0">
-              <a:buNone/>
-              <a:defRPr sz="392" b="1"/>
+            <a:lvl5pPr marL="556687" indent="0">
+              <a:buNone/>
+              <a:defRPr sz="487" b="1"/>
             </a:lvl5pPr>
-            <a:lvl6pPr marL="560299" indent="0">
-              <a:buNone/>
-              <a:defRPr sz="392" b="1"/>
+            <a:lvl6pPr marL="695858" indent="0">
+              <a:buNone/>
+              <a:defRPr sz="487" b="1"/>
             </a:lvl6pPr>
-            <a:lvl7pPr marL="672358" indent="0">
-              <a:buNone/>
-              <a:defRPr sz="392" b="1"/>
+            <a:lvl7pPr marL="835030" indent="0">
+              <a:buNone/>
+              <a:defRPr sz="487" b="1"/>
             </a:lvl7pPr>
-            <a:lvl8pPr marL="784418" indent="0">
-              <a:buNone/>
-              <a:defRPr sz="392" b="1"/>
+            <a:lvl8pPr marL="974202" indent="0">
+              <a:buNone/>
+              <a:defRPr sz="487" b="1"/>
             </a:lvl8pPr>
-            <a:lvl9pPr marL="896478" indent="0">
-              <a:buNone/>
-              <a:defRPr sz="392" b="1"/>
+            <a:lvl9pPr marL="1113373" indent="0">
+              <a:buNone/>
+              <a:defRPr sz="487" b="1"/>
             </a:lvl9pPr>
           </a:lstStyle>
           <a:p>
@@ -2292,8 +2353,8 @@
         </p:nvSpPr>
         <p:spPr>
           <a:xfrm>
-            <a:off x="1512510" y="631488"/>
-            <a:ext cx="1270151" cy="928823"/>
+            <a:off x="2095976" y="762540"/>
+            <a:ext cx="1760124" cy="1121582"/>
           </a:xfrm>
         </p:spPr>
         <p:txBody>
@@ -2354,7 +2415,7 @@
           <a:p>
             <a:fld id="{BD991D17-A80B-440D-B07A-8FE6A2A163B8}" type="datetimeFigureOut">
               <a:rPr lang="it-IT" smtClean="0"/>
-              <a:t>19/11/2025</a:t>
+              <a:t>26/01/2026</a:t>
             </a:fld>
             <a:endParaRPr lang="it-IT"/>
           </a:p>
@@ -2405,7 +2466,7 @@
     </p:spTree>
     <p:extLst>
       <p:ext uri="{BB962C8B-B14F-4D97-AF65-F5344CB8AC3E}">
-        <p14:creationId xmlns:p14="http://schemas.microsoft.com/office/powerpoint/2010/main" val="1017646972"/>
+        <p14:creationId xmlns:p14="http://schemas.microsoft.com/office/powerpoint/2010/main" val="2502892971"/>
       </p:ext>
     </p:extLst>
   </p:cSld>
@@ -2472,7 +2533,7 @@
           <a:p>
             <a:fld id="{BD991D17-A80B-440D-B07A-8FE6A2A163B8}" type="datetimeFigureOut">
               <a:rPr lang="it-IT" smtClean="0"/>
-              <a:t>19/11/2025</a:t>
+              <a:t>26/01/2026</a:t>
             </a:fld>
             <a:endParaRPr lang="it-IT"/>
           </a:p>
@@ -2523,7 +2584,7 @@
     </p:spTree>
     <p:extLst>
       <p:ext uri="{BB962C8B-B14F-4D97-AF65-F5344CB8AC3E}">
-        <p14:creationId xmlns:p14="http://schemas.microsoft.com/office/powerpoint/2010/main" val="4130124968"/>
+        <p14:creationId xmlns:p14="http://schemas.microsoft.com/office/powerpoint/2010/main" val="1859480112"/>
       </p:ext>
     </p:extLst>
   </p:cSld>
@@ -2567,7 +2628,7 @@
           <a:p>
             <a:fld id="{BD991D17-A80B-440D-B07A-8FE6A2A163B8}" type="datetimeFigureOut">
               <a:rPr lang="it-IT" smtClean="0"/>
-              <a:t>19/11/2025</a:t>
+              <a:t>26/01/2026</a:t>
             </a:fld>
             <a:endParaRPr lang="it-IT"/>
           </a:p>
@@ -2618,7 +2679,7 @@
     </p:spTree>
     <p:extLst>
       <p:ext uri="{BB962C8B-B14F-4D97-AF65-F5344CB8AC3E}">
-        <p14:creationId xmlns:p14="http://schemas.microsoft.com/office/powerpoint/2010/main" val="2315507640"/>
+        <p14:creationId xmlns:p14="http://schemas.microsoft.com/office/powerpoint/2010/main" val="4285389365"/>
       </p:ext>
     </p:extLst>
   </p:cSld>
@@ -2657,15 +2718,15 @@
         </p:nvSpPr>
         <p:spPr>
           <a:xfrm>
-            <a:off x="205792" y="115252"/>
-            <a:ext cx="963603" cy="403384"/>
+            <a:off x="285178" y="139171"/>
+            <a:ext cx="1335322" cy="487098"/>
           </a:xfrm>
         </p:spPr>
         <p:txBody>
           <a:bodyPr anchor="b"/>
           <a:lstStyle>
             <a:lvl1pPr>
-              <a:defRPr sz="784"/>
+              <a:defRPr sz="974"/>
             </a:lvl1pPr>
           </a:lstStyle>
           <a:p>
@@ -2689,39 +2750,39 @@
         </p:nvSpPr>
         <p:spPr>
           <a:xfrm>
-            <a:off x="1270151" y="248914"/>
-            <a:ext cx="1512510" cy="1228560"/>
+            <a:off x="1760124" y="300570"/>
+            <a:ext cx="2095976" cy="1483523"/>
           </a:xfrm>
         </p:spPr>
         <p:txBody>
           <a:bodyPr/>
           <a:lstStyle>
             <a:lvl1pPr>
-              <a:defRPr sz="784"/>
+              <a:defRPr sz="974"/>
             </a:lvl1pPr>
             <a:lvl2pPr>
-              <a:defRPr sz="686"/>
+              <a:defRPr sz="852"/>
             </a:lvl2pPr>
             <a:lvl3pPr>
-              <a:defRPr sz="588"/>
+              <a:defRPr sz="731"/>
             </a:lvl3pPr>
             <a:lvl4pPr>
-              <a:defRPr sz="490"/>
+              <a:defRPr sz="609"/>
             </a:lvl4pPr>
             <a:lvl5pPr>
-              <a:defRPr sz="490"/>
+              <a:defRPr sz="609"/>
             </a:lvl5pPr>
             <a:lvl6pPr>
-              <a:defRPr sz="490"/>
+              <a:defRPr sz="609"/>
             </a:lvl6pPr>
             <a:lvl7pPr>
-              <a:defRPr sz="490"/>
+              <a:defRPr sz="609"/>
             </a:lvl7pPr>
             <a:lvl8pPr>
-              <a:defRPr sz="490"/>
+              <a:defRPr sz="609"/>
             </a:lvl8pPr>
             <a:lvl9pPr>
-              <a:defRPr sz="490"/>
+              <a:defRPr sz="609"/>
             </a:lvl9pPr>
           </a:lstStyle>
           <a:p>
@@ -2774,8 +2835,8 @@
         </p:nvSpPr>
         <p:spPr>
           <a:xfrm>
-            <a:off x="205792" y="518636"/>
-            <a:ext cx="963603" cy="960838"/>
+            <a:off x="285178" y="626269"/>
+            <a:ext cx="1335322" cy="1160241"/>
           </a:xfrm>
         </p:spPr>
         <p:txBody>
@@ -2783,39 +2844,39 @@
           <a:lstStyle>
             <a:lvl1pPr marL="0" indent="0">
               <a:buNone/>
-              <a:defRPr sz="392"/>
+              <a:defRPr sz="487"/>
             </a:lvl1pPr>
-            <a:lvl2pPr marL="112060" indent="0">
-              <a:buNone/>
-              <a:defRPr sz="343"/>
+            <a:lvl2pPr marL="139172" indent="0">
+              <a:buNone/>
+              <a:defRPr sz="426"/>
             </a:lvl2pPr>
-            <a:lvl3pPr marL="224119" indent="0">
-              <a:buNone/>
-              <a:defRPr sz="294"/>
+            <a:lvl3pPr marL="278343" indent="0">
+              <a:buNone/>
+              <a:defRPr sz="365"/>
             </a:lvl3pPr>
-            <a:lvl4pPr marL="336179" indent="0">
-              <a:buNone/>
-              <a:defRPr sz="245"/>
+            <a:lvl4pPr marL="417515" indent="0">
+              <a:buNone/>
+              <a:defRPr sz="304"/>
             </a:lvl4pPr>
-            <a:lvl5pPr marL="448239" indent="0">
-              <a:buNone/>
-              <a:defRPr sz="245"/>
+            <a:lvl5pPr marL="556687" indent="0">
+              <a:buNone/>
+              <a:defRPr sz="304"/>
             </a:lvl5pPr>
-            <a:lvl6pPr marL="560299" indent="0">
-              <a:buNone/>
-              <a:defRPr sz="245"/>
+            <a:lvl6pPr marL="695858" indent="0">
+              <a:buNone/>
+              <a:defRPr sz="304"/>
             </a:lvl6pPr>
-            <a:lvl7pPr marL="672358" indent="0">
-              <a:buNone/>
-              <a:defRPr sz="245"/>
+            <a:lvl7pPr marL="835030" indent="0">
+              <a:buNone/>
+              <a:defRPr sz="304"/>
             </a:lvl7pPr>
-            <a:lvl8pPr marL="784418" indent="0">
-              <a:buNone/>
-              <a:defRPr sz="245"/>
+            <a:lvl8pPr marL="974202" indent="0">
+              <a:buNone/>
+              <a:defRPr sz="304"/>
             </a:lvl8pPr>
-            <a:lvl9pPr marL="896478" indent="0">
-              <a:buNone/>
-              <a:defRPr sz="245"/>
+            <a:lvl9pPr marL="1113373" indent="0">
+              <a:buNone/>
+              <a:defRPr sz="304"/>
             </a:lvl9pPr>
           </a:lstStyle>
           <a:p>
@@ -2844,7 +2905,7 @@
           <a:p>
             <a:fld id="{BD991D17-A80B-440D-B07A-8FE6A2A163B8}" type="datetimeFigureOut">
               <a:rPr lang="it-IT" smtClean="0"/>
-              <a:t>19/11/2025</a:t>
+              <a:t>26/01/2026</a:t>
             </a:fld>
             <a:endParaRPr lang="it-IT"/>
           </a:p>
@@ -2895,7 +2956,7 @@
     </p:spTree>
     <p:extLst>
       <p:ext uri="{BB962C8B-B14F-4D97-AF65-F5344CB8AC3E}">
-        <p14:creationId xmlns:p14="http://schemas.microsoft.com/office/powerpoint/2010/main" val="1707495848"/>
+        <p14:creationId xmlns:p14="http://schemas.microsoft.com/office/powerpoint/2010/main" val="2772490766"/>
       </p:ext>
     </p:extLst>
   </p:cSld>
@@ -2934,15 +2995,15 @@
         </p:nvSpPr>
         <p:spPr>
           <a:xfrm>
-            <a:off x="205792" y="115252"/>
-            <a:ext cx="963603" cy="403384"/>
+            <a:off x="285178" y="139171"/>
+            <a:ext cx="1335322" cy="487098"/>
           </a:xfrm>
         </p:spPr>
         <p:txBody>
           <a:bodyPr anchor="b"/>
           <a:lstStyle>
             <a:lvl1pPr>
-              <a:defRPr sz="784"/>
+              <a:defRPr sz="974"/>
             </a:lvl1pPr>
           </a:lstStyle>
           <a:p>
@@ -2966,8 +3027,8 @@
         </p:nvSpPr>
         <p:spPr>
           <a:xfrm>
-            <a:off x="1270151" y="248914"/>
-            <a:ext cx="1512510" cy="1228560"/>
+            <a:off x="1760124" y="300570"/>
+            <a:ext cx="2095976" cy="1483523"/>
           </a:xfrm>
         </p:spPr>
         <p:txBody>
@@ -2975,39 +3036,39 @@
           <a:lstStyle>
             <a:lvl1pPr marL="0" indent="0">
               <a:buNone/>
-              <a:defRPr sz="784"/>
+              <a:defRPr sz="974"/>
             </a:lvl1pPr>
-            <a:lvl2pPr marL="112060" indent="0">
-              <a:buNone/>
-              <a:defRPr sz="686"/>
+            <a:lvl2pPr marL="139172" indent="0">
+              <a:buNone/>
+              <a:defRPr sz="852"/>
             </a:lvl2pPr>
-            <a:lvl3pPr marL="224119" indent="0">
-              <a:buNone/>
-              <a:defRPr sz="588"/>
+            <a:lvl3pPr marL="278343" indent="0">
+              <a:buNone/>
+              <a:defRPr sz="731"/>
             </a:lvl3pPr>
-            <a:lvl4pPr marL="336179" indent="0">
-              <a:buNone/>
-              <a:defRPr sz="490"/>
+            <a:lvl4pPr marL="417515" indent="0">
+              <a:buNone/>
+              <a:defRPr sz="609"/>
             </a:lvl4pPr>
-            <a:lvl5pPr marL="448239" indent="0">
-              <a:buNone/>
-              <a:defRPr sz="490"/>
+            <a:lvl5pPr marL="556687" indent="0">
+              <a:buNone/>
+              <a:defRPr sz="609"/>
             </a:lvl5pPr>
-            <a:lvl6pPr marL="560299" indent="0">
-              <a:buNone/>
-              <a:defRPr sz="490"/>
+            <a:lvl6pPr marL="695858" indent="0">
+              <a:buNone/>
+              <a:defRPr sz="609"/>
             </a:lvl6pPr>
-            <a:lvl7pPr marL="672358" indent="0">
-              <a:buNone/>
-              <a:defRPr sz="490"/>
+            <a:lvl7pPr marL="835030" indent="0">
+              <a:buNone/>
+              <a:defRPr sz="609"/>
             </a:lvl7pPr>
-            <a:lvl8pPr marL="784418" indent="0">
-              <a:buNone/>
-              <a:defRPr sz="490"/>
+            <a:lvl8pPr marL="974202" indent="0">
+              <a:buNone/>
+              <a:defRPr sz="609"/>
             </a:lvl8pPr>
-            <a:lvl9pPr marL="896478" indent="0">
-              <a:buNone/>
-              <a:defRPr sz="490"/>
+            <a:lvl9pPr marL="1113373" indent="0">
+              <a:buNone/>
+              <a:defRPr sz="609"/>
             </a:lvl9pPr>
           </a:lstStyle>
           <a:p>
@@ -3031,8 +3092,8 @@
         </p:nvSpPr>
         <p:spPr>
           <a:xfrm>
-            <a:off x="205792" y="518636"/>
-            <a:ext cx="963603" cy="960838"/>
+            <a:off x="285178" y="626269"/>
+            <a:ext cx="1335322" cy="1160241"/>
           </a:xfrm>
         </p:spPr>
         <p:txBody>
@@ -3040,39 +3101,39 @@
           <a:lstStyle>
             <a:lvl1pPr marL="0" indent="0">
               <a:buNone/>
-              <a:defRPr sz="392"/>
+              <a:defRPr sz="487"/>
             </a:lvl1pPr>
-            <a:lvl2pPr marL="112060" indent="0">
-              <a:buNone/>
-              <a:defRPr sz="343"/>
+            <a:lvl2pPr marL="139172" indent="0">
+              <a:buNone/>
+              <a:defRPr sz="426"/>
             </a:lvl2pPr>
-            <a:lvl3pPr marL="224119" indent="0">
-              <a:buNone/>
-              <a:defRPr sz="294"/>
+            <a:lvl3pPr marL="278343" indent="0">
+              <a:buNone/>
+              <a:defRPr sz="365"/>
             </a:lvl3pPr>
-            <a:lvl4pPr marL="336179" indent="0">
-              <a:buNone/>
-              <a:defRPr sz="245"/>
+            <a:lvl4pPr marL="417515" indent="0">
+              <a:buNone/>
+              <a:defRPr sz="304"/>
             </a:lvl4pPr>
-            <a:lvl5pPr marL="448239" indent="0">
-              <a:buNone/>
-              <a:defRPr sz="245"/>
+            <a:lvl5pPr marL="556687" indent="0">
+              <a:buNone/>
+              <a:defRPr sz="304"/>
             </a:lvl5pPr>
-            <a:lvl6pPr marL="560299" indent="0">
-              <a:buNone/>
-              <a:defRPr sz="245"/>
+            <a:lvl6pPr marL="695858" indent="0">
+              <a:buNone/>
+              <a:defRPr sz="304"/>
             </a:lvl6pPr>
-            <a:lvl7pPr marL="672358" indent="0">
-              <a:buNone/>
-              <a:defRPr sz="245"/>
+            <a:lvl7pPr marL="835030" indent="0">
+              <a:buNone/>
+              <a:defRPr sz="304"/>
             </a:lvl7pPr>
-            <a:lvl8pPr marL="784418" indent="0">
-              <a:buNone/>
-              <a:defRPr sz="245"/>
+            <a:lvl8pPr marL="974202" indent="0">
+              <a:buNone/>
+              <a:defRPr sz="304"/>
             </a:lvl8pPr>
-            <a:lvl9pPr marL="896478" indent="0">
-              <a:buNone/>
-              <a:defRPr sz="245"/>
+            <a:lvl9pPr marL="1113373" indent="0">
+              <a:buNone/>
+              <a:defRPr sz="304"/>
             </a:lvl9pPr>
           </a:lstStyle>
           <a:p>
@@ -3101,7 +3162,7 @@
           <a:p>
             <a:fld id="{BD991D17-A80B-440D-B07A-8FE6A2A163B8}" type="datetimeFigureOut">
               <a:rPr lang="it-IT" smtClean="0"/>
-              <a:t>19/11/2025</a:t>
+              <a:t>26/01/2026</a:t>
             </a:fld>
             <a:endParaRPr lang="it-IT"/>
           </a:p>
@@ -3152,7 +3213,7 @@
     </p:spTree>
     <p:extLst>
       <p:ext uri="{BB962C8B-B14F-4D97-AF65-F5344CB8AC3E}">
-        <p14:creationId xmlns:p14="http://schemas.microsoft.com/office/powerpoint/2010/main" val="4097549502"/>
+        <p14:creationId xmlns:p14="http://schemas.microsoft.com/office/powerpoint/2010/main" val="753086843"/>
       </p:ext>
     </p:extLst>
   </p:cSld>
@@ -3196,8 +3257,8 @@
         </p:nvSpPr>
         <p:spPr>
           <a:xfrm>
-            <a:off x="205403" y="92042"/>
-            <a:ext cx="2576870" cy="334152"/>
+            <a:off x="284639" y="111144"/>
+            <a:ext cx="3570923" cy="403499"/>
           </a:xfrm>
           <a:prstGeom prst="rect">
             <a:avLst/>
@@ -3229,8 +3290,8 @@
         </p:nvSpPr>
         <p:spPr>
           <a:xfrm>
-            <a:off x="205403" y="460210"/>
-            <a:ext cx="2576870" cy="1096900"/>
+            <a:off x="284639" y="555717"/>
+            <a:ext cx="3570923" cy="1324540"/>
           </a:xfrm>
           <a:prstGeom prst="rect">
             <a:avLst/>
@@ -3291,8 +3352,8 @@
         </p:nvSpPr>
         <p:spPr>
           <a:xfrm>
-            <a:off x="205403" y="1602330"/>
-            <a:ext cx="672227" cy="92042"/>
+            <a:off x="284639" y="1934862"/>
+            <a:ext cx="931545" cy="111143"/>
           </a:xfrm>
           <a:prstGeom prst="rect">
             <a:avLst/>
@@ -3302,7 +3363,7 @@
           <a:bodyPr vert="horz" lIns="91440" tIns="45720" rIns="91440" bIns="45720" rtlCol="0" anchor="ctr"/>
           <a:lstStyle>
             <a:lvl1pPr algn="l">
-              <a:defRPr sz="294">
+              <a:defRPr sz="365">
                 <a:solidFill>
                   <a:schemeClr val="tx1">
                     <a:tint val="82000"/>
@@ -3314,7 +3375,7 @@
           <a:p>
             <a:fld id="{BD991D17-A80B-440D-B07A-8FE6A2A163B8}" type="datetimeFigureOut">
               <a:rPr lang="it-IT" smtClean="0"/>
-              <a:t>19/11/2025</a:t>
+              <a:t>26/01/2026</a:t>
             </a:fld>
             <a:endParaRPr lang="it-IT"/>
           </a:p>
@@ -3332,8 +3393,8 @@
         </p:nvSpPr>
         <p:spPr>
           <a:xfrm>
-            <a:off x="989668" y="1602330"/>
-            <a:ext cx="1008340" cy="92042"/>
+            <a:off x="1371441" y="1934862"/>
+            <a:ext cx="1397318" cy="111143"/>
           </a:xfrm>
           <a:prstGeom prst="rect">
             <a:avLst/>
@@ -3343,7 +3404,7 @@
           <a:bodyPr vert="horz" lIns="91440" tIns="45720" rIns="91440" bIns="45720" rtlCol="0" anchor="ctr"/>
           <a:lstStyle>
             <a:lvl1pPr algn="ctr">
-              <a:defRPr sz="294">
+              <a:defRPr sz="365">
                 <a:solidFill>
                   <a:schemeClr val="tx1">
                     <a:tint val="82000"/>
@@ -3369,8 +3430,8 @@
         </p:nvSpPr>
         <p:spPr>
           <a:xfrm>
-            <a:off x="2110045" y="1602330"/>
-            <a:ext cx="672227" cy="92042"/>
+            <a:off x="2924016" y="1934862"/>
+            <a:ext cx="931545" cy="111143"/>
           </a:xfrm>
           <a:prstGeom prst="rect">
             <a:avLst/>
@@ -3380,7 +3441,7 @@
           <a:bodyPr vert="horz" lIns="91440" tIns="45720" rIns="91440" bIns="45720" rtlCol="0" anchor="ctr"/>
           <a:lstStyle>
             <a:lvl1pPr algn="r">
-              <a:defRPr sz="294">
+              <a:defRPr sz="365">
                 <a:solidFill>
                   <a:schemeClr val="tx1">
                     <a:tint val="82000"/>
@@ -3401,27 +3462,27 @@
     </p:spTree>
     <p:extLst>
       <p:ext uri="{BB962C8B-B14F-4D97-AF65-F5344CB8AC3E}">
-        <p14:creationId xmlns:p14="http://schemas.microsoft.com/office/powerpoint/2010/main" val="496293129"/>
+        <p14:creationId xmlns:p14="http://schemas.microsoft.com/office/powerpoint/2010/main" val="200526636"/>
       </p:ext>
     </p:extLst>
   </p:cSld>
   <p:clrMap bg1="lt1" tx1="dk1" bg2="lt2" tx2="dk2" accent1="accent1" accent2="accent2" accent3="accent3" accent4="accent4" accent5="accent5" accent6="accent6" hlink="hlink" folHlink="folHlink"/>
   <p:sldLayoutIdLst>
-    <p:sldLayoutId id="2147483697" r:id="rId1"/>
-    <p:sldLayoutId id="2147483698" r:id="rId2"/>
-    <p:sldLayoutId id="2147483699" r:id="rId3"/>
-    <p:sldLayoutId id="2147483700" r:id="rId4"/>
-    <p:sldLayoutId id="2147483701" r:id="rId5"/>
-    <p:sldLayoutId id="2147483702" r:id="rId6"/>
-    <p:sldLayoutId id="2147483703" r:id="rId7"/>
-    <p:sldLayoutId id="2147483704" r:id="rId8"/>
-    <p:sldLayoutId id="2147483705" r:id="rId9"/>
-    <p:sldLayoutId id="2147483706" r:id="rId10"/>
-    <p:sldLayoutId id="2147483707" r:id="rId11"/>
+    <p:sldLayoutId id="2147483733" r:id="rId1"/>
+    <p:sldLayoutId id="2147483734" r:id="rId2"/>
+    <p:sldLayoutId id="2147483735" r:id="rId3"/>
+    <p:sldLayoutId id="2147483736" r:id="rId4"/>
+    <p:sldLayoutId id="2147483737" r:id="rId5"/>
+    <p:sldLayoutId id="2147483738" r:id="rId6"/>
+    <p:sldLayoutId id="2147483739" r:id="rId7"/>
+    <p:sldLayoutId id="2147483740" r:id="rId8"/>
+    <p:sldLayoutId id="2147483741" r:id="rId9"/>
+    <p:sldLayoutId id="2147483742" r:id="rId10"/>
+    <p:sldLayoutId id="2147483743" r:id="rId11"/>
   </p:sldLayoutIdLst>
   <p:txStyles>
     <p:titleStyle>
-      <a:lvl1pPr algn="l" defTabSz="224119" rtl="0" eaLnBrk="1" latinLnBrk="0" hangingPunct="1">
+      <a:lvl1pPr algn="l" defTabSz="278343" rtl="0" eaLnBrk="1" latinLnBrk="0" hangingPunct="1">
         <a:lnSpc>
           <a:spcPct val="90000"/>
         </a:lnSpc>
@@ -3429,7 +3490,7 @@
           <a:spcPct val="0"/>
         </a:spcBef>
         <a:buNone/>
-        <a:defRPr sz="1078" kern="1200">
+        <a:defRPr sz="1339" kern="1200">
           <a:solidFill>
             <a:schemeClr val="tx1"/>
           </a:solidFill>
@@ -3440,16 +3501,16 @@
       </a:lvl1pPr>
     </p:titleStyle>
     <p:bodyStyle>
-      <a:lvl1pPr marL="56030" indent="-56030" algn="l" defTabSz="224119" rtl="0" eaLnBrk="1" latinLnBrk="0" hangingPunct="1">
+      <a:lvl1pPr marL="69586" indent="-69586" algn="l" defTabSz="278343" rtl="0" eaLnBrk="1" latinLnBrk="0" hangingPunct="1">
         <a:lnSpc>
           <a:spcPct val="90000"/>
         </a:lnSpc>
         <a:spcBef>
-          <a:spcPts val="245"/>
+          <a:spcPts val="304"/>
         </a:spcBef>
         <a:buFont typeface="Arial" panose="020B0604020202020204" pitchFamily="34" charset="0"/>
         <a:buChar char="•"/>
-        <a:defRPr sz="686" kern="1200">
+        <a:defRPr sz="852" kern="1200">
           <a:solidFill>
             <a:schemeClr val="tx1"/>
           </a:solidFill>
@@ -3458,16 +3519,16 @@
           <a:cs typeface="+mn-cs"/>
         </a:defRPr>
       </a:lvl1pPr>
-      <a:lvl2pPr marL="168090" indent="-56030" algn="l" defTabSz="224119" rtl="0" eaLnBrk="1" latinLnBrk="0" hangingPunct="1">
+      <a:lvl2pPr marL="208758" indent="-69586" algn="l" defTabSz="278343" rtl="0" eaLnBrk="1" latinLnBrk="0" hangingPunct="1">
         <a:lnSpc>
           <a:spcPct val="90000"/>
         </a:lnSpc>
         <a:spcBef>
-          <a:spcPts val="123"/>
+          <a:spcPts val="152"/>
         </a:spcBef>
         <a:buFont typeface="Arial" panose="020B0604020202020204" pitchFamily="34" charset="0"/>
         <a:buChar char="•"/>
-        <a:defRPr sz="588" kern="1200">
+        <a:defRPr sz="731" kern="1200">
           <a:solidFill>
             <a:schemeClr val="tx1"/>
           </a:solidFill>
@@ -3476,16 +3537,16 @@
           <a:cs typeface="+mn-cs"/>
         </a:defRPr>
       </a:lvl2pPr>
-      <a:lvl3pPr marL="280149" indent="-56030" algn="l" defTabSz="224119" rtl="0" eaLnBrk="1" latinLnBrk="0" hangingPunct="1">
+      <a:lvl3pPr marL="347929" indent="-69586" algn="l" defTabSz="278343" rtl="0" eaLnBrk="1" latinLnBrk="0" hangingPunct="1">
         <a:lnSpc>
           <a:spcPct val="90000"/>
         </a:lnSpc>
         <a:spcBef>
-          <a:spcPts val="123"/>
+          <a:spcPts val="152"/>
         </a:spcBef>
         <a:buFont typeface="Arial" panose="020B0604020202020204" pitchFamily="34" charset="0"/>
         <a:buChar char="•"/>
-        <a:defRPr sz="490" kern="1200">
+        <a:defRPr sz="609" kern="1200">
           <a:solidFill>
             <a:schemeClr val="tx1"/>
           </a:solidFill>
@@ -3494,16 +3555,16 @@
           <a:cs typeface="+mn-cs"/>
         </a:defRPr>
       </a:lvl3pPr>
-      <a:lvl4pPr marL="392209" indent="-56030" algn="l" defTabSz="224119" rtl="0" eaLnBrk="1" latinLnBrk="0" hangingPunct="1">
+      <a:lvl4pPr marL="487101" indent="-69586" algn="l" defTabSz="278343" rtl="0" eaLnBrk="1" latinLnBrk="0" hangingPunct="1">
         <a:lnSpc>
           <a:spcPct val="90000"/>
         </a:lnSpc>
         <a:spcBef>
-          <a:spcPts val="123"/>
+          <a:spcPts val="152"/>
         </a:spcBef>
         <a:buFont typeface="Arial" panose="020B0604020202020204" pitchFamily="34" charset="0"/>
         <a:buChar char="•"/>
-        <a:defRPr sz="441" kern="1200">
+        <a:defRPr sz="548" kern="1200">
           <a:solidFill>
             <a:schemeClr val="tx1"/>
           </a:solidFill>
@@ -3512,16 +3573,16 @@
           <a:cs typeface="+mn-cs"/>
         </a:defRPr>
       </a:lvl4pPr>
-      <a:lvl5pPr marL="504269" indent="-56030" algn="l" defTabSz="224119" rtl="0" eaLnBrk="1" latinLnBrk="0" hangingPunct="1">
+      <a:lvl5pPr marL="626273" indent="-69586" algn="l" defTabSz="278343" rtl="0" eaLnBrk="1" latinLnBrk="0" hangingPunct="1">
         <a:lnSpc>
           <a:spcPct val="90000"/>
         </a:lnSpc>
         <a:spcBef>
-          <a:spcPts val="123"/>
+          <a:spcPts val="152"/>
         </a:spcBef>
         <a:buFont typeface="Arial" panose="020B0604020202020204" pitchFamily="34" charset="0"/>
         <a:buChar char="•"/>
-        <a:defRPr sz="441" kern="1200">
+        <a:defRPr sz="548" kern="1200">
           <a:solidFill>
             <a:schemeClr val="tx1"/>
           </a:solidFill>
@@ -3530,16 +3591,16 @@
           <a:cs typeface="+mn-cs"/>
         </a:defRPr>
       </a:lvl5pPr>
-      <a:lvl6pPr marL="616328" indent="-56030" algn="l" defTabSz="224119" rtl="0" eaLnBrk="1" latinLnBrk="0" hangingPunct="1">
+      <a:lvl6pPr marL="765444" indent="-69586" algn="l" defTabSz="278343" rtl="0" eaLnBrk="1" latinLnBrk="0" hangingPunct="1">
         <a:lnSpc>
           <a:spcPct val="90000"/>
         </a:lnSpc>
         <a:spcBef>
-          <a:spcPts val="123"/>
+          <a:spcPts val="152"/>
         </a:spcBef>
         <a:buFont typeface="Arial" panose="020B0604020202020204" pitchFamily="34" charset="0"/>
         <a:buChar char="•"/>
-        <a:defRPr sz="441" kern="1200">
+        <a:defRPr sz="548" kern="1200">
           <a:solidFill>
             <a:schemeClr val="tx1"/>
           </a:solidFill>
@@ -3548,16 +3609,16 @@
           <a:cs typeface="+mn-cs"/>
         </a:defRPr>
       </a:lvl6pPr>
-      <a:lvl7pPr marL="728388" indent="-56030" algn="l" defTabSz="224119" rtl="0" eaLnBrk="1" latinLnBrk="0" hangingPunct="1">
+      <a:lvl7pPr marL="904616" indent="-69586" algn="l" defTabSz="278343" rtl="0" eaLnBrk="1" latinLnBrk="0" hangingPunct="1">
         <a:lnSpc>
           <a:spcPct val="90000"/>
         </a:lnSpc>
         <a:spcBef>
-          <a:spcPts val="123"/>
+          <a:spcPts val="152"/>
         </a:spcBef>
         <a:buFont typeface="Arial" panose="020B0604020202020204" pitchFamily="34" charset="0"/>
         <a:buChar char="•"/>
-        <a:defRPr sz="441" kern="1200">
+        <a:defRPr sz="548" kern="1200">
           <a:solidFill>
             <a:schemeClr val="tx1"/>
           </a:solidFill>
@@ -3566,16 +3627,16 @@
           <a:cs typeface="+mn-cs"/>
         </a:defRPr>
       </a:lvl7pPr>
-      <a:lvl8pPr marL="840448" indent="-56030" algn="l" defTabSz="224119" rtl="0" eaLnBrk="1" latinLnBrk="0" hangingPunct="1">
+      <a:lvl8pPr marL="1043788" indent="-69586" algn="l" defTabSz="278343" rtl="0" eaLnBrk="1" latinLnBrk="0" hangingPunct="1">
         <a:lnSpc>
           <a:spcPct val="90000"/>
         </a:lnSpc>
         <a:spcBef>
-          <a:spcPts val="123"/>
+          <a:spcPts val="152"/>
         </a:spcBef>
         <a:buFont typeface="Arial" panose="020B0604020202020204" pitchFamily="34" charset="0"/>
         <a:buChar char="•"/>
-        <a:defRPr sz="441" kern="1200">
+        <a:defRPr sz="548" kern="1200">
           <a:solidFill>
             <a:schemeClr val="tx1"/>
           </a:solidFill>
@@ -3584,16 +3645,16 @@
           <a:cs typeface="+mn-cs"/>
         </a:defRPr>
       </a:lvl8pPr>
-      <a:lvl9pPr marL="952508" indent="-56030" algn="l" defTabSz="224119" rtl="0" eaLnBrk="1" latinLnBrk="0" hangingPunct="1">
+      <a:lvl9pPr marL="1182959" indent="-69586" algn="l" defTabSz="278343" rtl="0" eaLnBrk="1" latinLnBrk="0" hangingPunct="1">
         <a:lnSpc>
           <a:spcPct val="90000"/>
         </a:lnSpc>
         <a:spcBef>
-          <a:spcPts val="123"/>
+          <a:spcPts val="152"/>
         </a:spcBef>
         <a:buFont typeface="Arial" panose="020B0604020202020204" pitchFamily="34" charset="0"/>
         <a:buChar char="•"/>
-        <a:defRPr sz="441" kern="1200">
+        <a:defRPr sz="548" kern="1200">
           <a:solidFill>
             <a:schemeClr val="tx1"/>
           </a:solidFill>
@@ -3607,8 +3668,8 @@
       <a:defPPr>
         <a:defRPr lang="en-US"/>
       </a:defPPr>
-      <a:lvl1pPr marL="0" algn="l" defTabSz="224119" rtl="0" eaLnBrk="1" latinLnBrk="0" hangingPunct="1">
-        <a:defRPr sz="441" kern="1200">
+      <a:lvl1pPr marL="0" algn="l" defTabSz="278343" rtl="0" eaLnBrk="1" latinLnBrk="0" hangingPunct="1">
+        <a:defRPr sz="548" kern="1200">
           <a:solidFill>
             <a:schemeClr val="tx1"/>
           </a:solidFill>
@@ -3617,8 +3678,8 @@
           <a:cs typeface="+mn-cs"/>
         </a:defRPr>
       </a:lvl1pPr>
-      <a:lvl2pPr marL="112060" algn="l" defTabSz="224119" rtl="0" eaLnBrk="1" latinLnBrk="0" hangingPunct="1">
-        <a:defRPr sz="441" kern="1200">
+      <a:lvl2pPr marL="139172" algn="l" defTabSz="278343" rtl="0" eaLnBrk="1" latinLnBrk="0" hangingPunct="1">
+        <a:defRPr sz="548" kern="1200">
           <a:solidFill>
             <a:schemeClr val="tx1"/>
           </a:solidFill>
@@ -3627,8 +3688,8 @@
           <a:cs typeface="+mn-cs"/>
         </a:defRPr>
       </a:lvl2pPr>
-      <a:lvl3pPr marL="224119" algn="l" defTabSz="224119" rtl="0" eaLnBrk="1" latinLnBrk="0" hangingPunct="1">
-        <a:defRPr sz="441" kern="1200">
+      <a:lvl3pPr marL="278343" algn="l" defTabSz="278343" rtl="0" eaLnBrk="1" latinLnBrk="0" hangingPunct="1">
+        <a:defRPr sz="548" kern="1200">
           <a:solidFill>
             <a:schemeClr val="tx1"/>
           </a:solidFill>
@@ -3637,8 +3698,8 @@
           <a:cs typeface="+mn-cs"/>
         </a:defRPr>
       </a:lvl3pPr>
-      <a:lvl4pPr marL="336179" algn="l" defTabSz="224119" rtl="0" eaLnBrk="1" latinLnBrk="0" hangingPunct="1">
-        <a:defRPr sz="441" kern="1200">
+      <a:lvl4pPr marL="417515" algn="l" defTabSz="278343" rtl="0" eaLnBrk="1" latinLnBrk="0" hangingPunct="1">
+        <a:defRPr sz="548" kern="1200">
           <a:solidFill>
             <a:schemeClr val="tx1"/>
           </a:solidFill>
@@ -3647,8 +3708,8 @@
           <a:cs typeface="+mn-cs"/>
         </a:defRPr>
       </a:lvl4pPr>
-      <a:lvl5pPr marL="448239" algn="l" defTabSz="224119" rtl="0" eaLnBrk="1" latinLnBrk="0" hangingPunct="1">
-        <a:defRPr sz="441" kern="1200">
+      <a:lvl5pPr marL="556687" algn="l" defTabSz="278343" rtl="0" eaLnBrk="1" latinLnBrk="0" hangingPunct="1">
+        <a:defRPr sz="548" kern="1200">
           <a:solidFill>
             <a:schemeClr val="tx1"/>
           </a:solidFill>
@@ -3657,8 +3718,8 @@
           <a:cs typeface="+mn-cs"/>
         </a:defRPr>
       </a:lvl5pPr>
-      <a:lvl6pPr marL="560299" algn="l" defTabSz="224119" rtl="0" eaLnBrk="1" latinLnBrk="0" hangingPunct="1">
-        <a:defRPr sz="441" kern="1200">
+      <a:lvl6pPr marL="695858" algn="l" defTabSz="278343" rtl="0" eaLnBrk="1" latinLnBrk="0" hangingPunct="1">
+        <a:defRPr sz="548" kern="1200">
           <a:solidFill>
             <a:schemeClr val="tx1"/>
           </a:solidFill>
@@ -3667,8 +3728,8 @@
           <a:cs typeface="+mn-cs"/>
         </a:defRPr>
       </a:lvl6pPr>
-      <a:lvl7pPr marL="672358" algn="l" defTabSz="224119" rtl="0" eaLnBrk="1" latinLnBrk="0" hangingPunct="1">
-        <a:defRPr sz="441" kern="1200">
+      <a:lvl7pPr marL="835030" algn="l" defTabSz="278343" rtl="0" eaLnBrk="1" latinLnBrk="0" hangingPunct="1">
+        <a:defRPr sz="548" kern="1200">
           <a:solidFill>
             <a:schemeClr val="tx1"/>
           </a:solidFill>
@@ -3677,8 +3738,8 @@
           <a:cs typeface="+mn-cs"/>
         </a:defRPr>
       </a:lvl7pPr>
-      <a:lvl8pPr marL="784418" algn="l" defTabSz="224119" rtl="0" eaLnBrk="1" latinLnBrk="0" hangingPunct="1">
-        <a:defRPr sz="441" kern="1200">
+      <a:lvl8pPr marL="974202" algn="l" defTabSz="278343" rtl="0" eaLnBrk="1" latinLnBrk="0" hangingPunct="1">
+        <a:defRPr sz="548" kern="1200">
           <a:solidFill>
             <a:schemeClr val="tx1"/>
           </a:solidFill>
@@ -3687,8 +3748,8 @@
           <a:cs typeface="+mn-cs"/>
         </a:defRPr>
       </a:lvl8pPr>
-      <a:lvl9pPr marL="896478" algn="l" defTabSz="224119" rtl="0" eaLnBrk="1" latinLnBrk="0" hangingPunct="1">
-        <a:defRPr sz="441" kern="1200">
+      <a:lvl9pPr marL="1113373" algn="l" defTabSz="278343" rtl="0" eaLnBrk="1" latinLnBrk="0" hangingPunct="1">
+        <a:defRPr sz="548" kern="1200">
           <a:solidFill>
             <a:schemeClr val="tx1"/>
           </a:solidFill>
@@ -3719,12 +3780,629 @@
           <a:chExt cx="0" cy="0"/>
         </a:xfrm>
       </p:grpSpPr>
-      <p:sp>
-        <p:nvSpPr>
-          <p:cNvPr id="17" name="TextBox 16">
+      <p:grpSp>
+        <p:nvGrpSpPr>
+          <p:cNvPr id="30" name="Group 29">
             <a:extLst>
               <a:ext uri="{FF2B5EF4-FFF2-40B4-BE49-F238E27FC236}">
-                <a16:creationId xmlns:a16="http://schemas.microsoft.com/office/drawing/2014/main" id="{539947CB-ED39-536C-6C0B-2EB551D05FFE}"/>
+                <a16:creationId xmlns:a16="http://schemas.microsoft.com/office/drawing/2014/main" id="{E90E6E01-8CF5-4E96-8B34-4501EF00DCBA}"/>
+              </a:ext>
+            </a:extLst>
+          </p:cNvPr>
+          <p:cNvGrpSpPr/>
+          <p:nvPr/>
+        </p:nvGrpSpPr>
+        <p:grpSpPr>
+          <a:xfrm>
+            <a:off x="724060" y="366368"/>
+            <a:ext cx="2814673" cy="1700073"/>
+            <a:chOff x="51759" y="17040"/>
+            <a:chExt cx="2975400" cy="1700073"/>
+          </a:xfrm>
+        </p:grpSpPr>
+        <p:sp>
+          <p:nvSpPr>
+            <p:cNvPr id="31" name="TextBox 30">
+              <a:extLst>
+                <a:ext uri="{FF2B5EF4-FFF2-40B4-BE49-F238E27FC236}">
+                  <a16:creationId xmlns:a16="http://schemas.microsoft.com/office/drawing/2014/main" id="{539947CB-ED39-536C-6C0B-2EB551D05FFE}"/>
+                </a:ext>
+              </a:extLst>
+            </p:cNvPr>
+            <p:cNvSpPr txBox="1"/>
+            <p:nvPr/>
+          </p:nvSpPr>
+          <p:spPr>
+            <a:xfrm>
+              <a:off x="610604" y="56207"/>
+              <a:ext cx="2416555" cy="461665"/>
+            </a:xfrm>
+            <a:prstGeom prst="rect">
+              <a:avLst/>
+            </a:prstGeom>
+            <a:noFill/>
+          </p:spPr>
+          <p:txBody>
+            <a:bodyPr wrap="square" rtlCol="0">
+              <a:spAutoFit/>
+            </a:bodyPr>
+            <a:lstStyle/>
+            <a:p>
+              <a:r>
+                <a:rPr lang="en-GB" sz="800" dirty="0">
+                  <a:solidFill>
+                    <a:schemeClr val="tx1">
+                      <a:lumMod val="85000"/>
+                      <a:lumOff val="15000"/>
+                    </a:schemeClr>
+                  </a:solidFill>
+                  <a:latin typeface="Calibri Light" panose="020F0302020204030204" pitchFamily="34" charset="0"/>
+                  <a:ea typeface="Calibri Light" panose="020F0302020204030204" pitchFamily="34" charset="0"/>
+                  <a:cs typeface="Calibri Light" panose="020F0302020204030204" pitchFamily="34" charset="0"/>
+                </a:rPr>
+                <a:t>Family:</a:t>
+              </a:r>
+              <a:r>
+                <a:rPr lang="en-GB" sz="800" b="1" dirty="0">
+                  <a:solidFill>
+                    <a:schemeClr val="tx1">
+                      <a:lumMod val="85000"/>
+                      <a:lumOff val="15000"/>
+                    </a:schemeClr>
+                  </a:solidFill>
+                  <a:latin typeface="Calibri Light" panose="020F0302020204030204" pitchFamily="34" charset="0"/>
+                  <a:ea typeface="Calibri Light" panose="020F0302020204030204" pitchFamily="34" charset="0"/>
+                  <a:cs typeface="Calibri Light" panose="020F0302020204030204" pitchFamily="34" charset="0"/>
+                </a:rPr>
+                <a:t> </a:t>
+              </a:r>
+              <a:r>
+                <a:rPr lang="en-GB" sz="800" dirty="0">
+                  <a:solidFill>
+                    <a:schemeClr val="tx1">
+                      <a:lumMod val="85000"/>
+                      <a:lumOff val="15000"/>
+                    </a:schemeClr>
+                  </a:solidFill>
+                  <a:latin typeface="Calibri Light" panose="020F0302020204030204" pitchFamily="34" charset="0"/>
+                  <a:ea typeface="Calibri Light" panose="020F0302020204030204" pitchFamily="34" charset="0"/>
+                  <a:cs typeface="Calibri Light" panose="020F0302020204030204" pitchFamily="34" charset="0"/>
+                </a:rPr>
+                <a:t>Bagging</a:t>
+              </a:r>
+            </a:p>
+            <a:p>
+              <a:r>
+                <a:rPr lang="en-GB" sz="800" dirty="0">
+                  <a:solidFill>
+                    <a:schemeClr val="tx1">
+                      <a:lumMod val="85000"/>
+                      <a:lumOff val="15000"/>
+                    </a:schemeClr>
+                  </a:solidFill>
+                  <a:latin typeface="Calibri Light" panose="020F0302020204030204" pitchFamily="34" charset="0"/>
+                  <a:ea typeface="Calibri Light" panose="020F0302020204030204" pitchFamily="34" charset="0"/>
+                  <a:cs typeface="Calibri Light" panose="020F0302020204030204" pitchFamily="34" charset="0"/>
+                </a:rPr>
+                <a:t>Algorithm: </a:t>
+              </a:r>
+              <a:r>
+                <a:rPr lang="en-GB" sz="800" b="1" dirty="0">
+                  <a:solidFill>
+                    <a:schemeClr val="tx1">
+                      <a:lumMod val="85000"/>
+                      <a:lumOff val="15000"/>
+                    </a:schemeClr>
+                  </a:solidFill>
+                  <a:latin typeface="Calibri" panose="020F0502020204030204" pitchFamily="34" charset="0"/>
+                  <a:ea typeface="Calibri" panose="020F0502020204030204" pitchFamily="34" charset="0"/>
+                  <a:cs typeface="Calibri" panose="020F0502020204030204" pitchFamily="34" charset="0"/>
+                </a:rPr>
+                <a:t>Random Forest </a:t>
+              </a:r>
+            </a:p>
+            <a:p>
+              <a:r>
+                <a:rPr lang="en-GB" sz="800" dirty="0">
+                  <a:solidFill>
+                    <a:schemeClr val="tx1">
+                      <a:lumMod val="85000"/>
+                      <a:lumOff val="15000"/>
+                    </a:schemeClr>
+                  </a:solidFill>
+                  <a:latin typeface="Calibri Light" panose="020F0302020204030204" pitchFamily="34" charset="0"/>
+                  <a:ea typeface="Calibri Light" panose="020F0302020204030204" pitchFamily="34" charset="0"/>
+                  <a:cs typeface="Calibri Light" panose="020F0302020204030204" pitchFamily="34" charset="0"/>
+                </a:rPr>
+                <a:t>Implementation(s): XGBoost - RF | LightGBM - RF</a:t>
+              </a:r>
+            </a:p>
+          </p:txBody>
+        </p:sp>
+        <p:sp>
+          <p:nvSpPr>
+            <p:cNvPr id="32" name="TextBox 31">
+              <a:extLst>
+                <a:ext uri="{FF2B5EF4-FFF2-40B4-BE49-F238E27FC236}">
+                  <a16:creationId xmlns:a16="http://schemas.microsoft.com/office/drawing/2014/main" id="{D7DE0A7F-FCD3-FD48-0A9C-2B36992C28EF}"/>
+                </a:ext>
+              </a:extLst>
+            </p:cNvPr>
+            <p:cNvSpPr txBox="1"/>
+            <p:nvPr/>
+          </p:nvSpPr>
+          <p:spPr>
+            <a:xfrm>
+              <a:off x="610604" y="633561"/>
+              <a:ext cx="2416555" cy="461665"/>
+            </a:xfrm>
+            <a:prstGeom prst="rect">
+              <a:avLst/>
+            </a:prstGeom>
+            <a:noFill/>
+          </p:spPr>
+          <p:txBody>
+            <a:bodyPr wrap="square" rtlCol="0">
+              <a:spAutoFit/>
+            </a:bodyPr>
+            <a:lstStyle/>
+            <a:p>
+              <a:r>
+                <a:rPr lang="en-GB" sz="800" dirty="0">
+                  <a:solidFill>
+                    <a:schemeClr val="tx1">
+                      <a:lumMod val="85000"/>
+                      <a:lumOff val="15000"/>
+                    </a:schemeClr>
+                  </a:solidFill>
+                  <a:latin typeface="Calibri Light" panose="020F0302020204030204" pitchFamily="34" charset="0"/>
+                  <a:ea typeface="Calibri Light" panose="020F0302020204030204" pitchFamily="34" charset="0"/>
+                  <a:cs typeface="Calibri Light" panose="020F0302020204030204" pitchFamily="34" charset="0"/>
+                </a:rPr>
+                <a:t>Family: Boosting</a:t>
+              </a:r>
+            </a:p>
+            <a:p>
+              <a:r>
+                <a:rPr lang="en-GB" sz="800" dirty="0">
+                  <a:solidFill>
+                    <a:schemeClr val="tx1">
+                      <a:lumMod val="85000"/>
+                      <a:lumOff val="15000"/>
+                    </a:schemeClr>
+                  </a:solidFill>
+                  <a:latin typeface="Calibri Light" panose="020F0302020204030204" pitchFamily="34" charset="0"/>
+                  <a:ea typeface="Calibri Light" panose="020F0302020204030204" pitchFamily="34" charset="0"/>
+                  <a:cs typeface="Calibri Light" panose="020F0302020204030204" pitchFamily="34" charset="0"/>
+                </a:rPr>
+                <a:t>Algorithm: </a:t>
+              </a:r>
+              <a:r>
+                <a:rPr lang="en-GB" sz="800" b="1" dirty="0">
+                  <a:solidFill>
+                    <a:schemeClr val="tx1">
+                      <a:lumMod val="85000"/>
+                      <a:lumOff val="15000"/>
+                    </a:schemeClr>
+                  </a:solidFill>
+                  <a:latin typeface="Calibri" panose="020F0502020204030204" pitchFamily="34" charset="0"/>
+                  <a:ea typeface="Calibri" panose="020F0502020204030204" pitchFamily="34" charset="0"/>
+                  <a:cs typeface="Calibri" panose="020F0502020204030204" pitchFamily="34" charset="0"/>
+                </a:rPr>
+                <a:t>Gradient Boosting</a:t>
+              </a:r>
+            </a:p>
+            <a:p>
+              <a:r>
+                <a:rPr lang="en-GB" sz="800" dirty="0">
+                  <a:solidFill>
+                    <a:schemeClr val="tx1">
+                      <a:lumMod val="85000"/>
+                      <a:lumOff val="15000"/>
+                    </a:schemeClr>
+                  </a:solidFill>
+                  <a:latin typeface="Calibri Light" panose="020F0302020204030204" pitchFamily="34" charset="0"/>
+                  <a:ea typeface="Calibri Light" panose="020F0302020204030204" pitchFamily="34" charset="0"/>
+                  <a:cs typeface="Calibri Light" panose="020F0302020204030204" pitchFamily="34" charset="0"/>
+                </a:rPr>
+                <a:t>Implementation(s): XGBoost | LightGBM | CatBoost</a:t>
+              </a:r>
+            </a:p>
+          </p:txBody>
+        </p:sp>
+        <p:sp>
+          <p:nvSpPr>
+            <p:cNvPr id="33" name="TextBox 32">
+              <a:extLst>
+                <a:ext uri="{FF2B5EF4-FFF2-40B4-BE49-F238E27FC236}">
+                  <a16:creationId xmlns:a16="http://schemas.microsoft.com/office/drawing/2014/main" id="{FDD47B8C-923F-C61A-E03C-069006159CDB}"/>
+                </a:ext>
+              </a:extLst>
+            </p:cNvPr>
+            <p:cNvSpPr txBox="1"/>
+            <p:nvPr/>
+          </p:nvSpPr>
+          <p:spPr>
+            <a:xfrm>
+              <a:off x="610604" y="1216280"/>
+              <a:ext cx="2416555" cy="461665"/>
+            </a:xfrm>
+            <a:prstGeom prst="rect">
+              <a:avLst/>
+            </a:prstGeom>
+            <a:noFill/>
+          </p:spPr>
+          <p:txBody>
+            <a:bodyPr wrap="square" rtlCol="0">
+              <a:spAutoFit/>
+            </a:bodyPr>
+            <a:lstStyle/>
+            <a:p>
+              <a:r>
+                <a:rPr lang="en-GB" sz="800" dirty="0">
+                  <a:solidFill>
+                    <a:schemeClr val="tx1">
+                      <a:lumMod val="85000"/>
+                      <a:lumOff val="15000"/>
+                    </a:schemeClr>
+                  </a:solidFill>
+                  <a:latin typeface="Calibri Light" panose="020F0302020204030204" pitchFamily="34" charset="0"/>
+                  <a:ea typeface="Calibri Light" panose="020F0302020204030204" pitchFamily="34" charset="0"/>
+                  <a:cs typeface="Calibri Light" panose="020F0302020204030204" pitchFamily="34" charset="0"/>
+                </a:rPr>
+                <a:t>Family: Neural networks</a:t>
+              </a:r>
+            </a:p>
+            <a:p>
+              <a:r>
+                <a:rPr lang="en-GB" sz="800" dirty="0">
+                  <a:solidFill>
+                    <a:schemeClr val="tx1">
+                      <a:lumMod val="85000"/>
+                      <a:lumOff val="15000"/>
+                    </a:schemeClr>
+                  </a:solidFill>
+                  <a:latin typeface="Calibri Light" panose="020F0302020204030204" pitchFamily="34" charset="0"/>
+                  <a:ea typeface="Calibri Light" panose="020F0302020204030204" pitchFamily="34" charset="0"/>
+                  <a:cs typeface="Calibri Light" panose="020F0302020204030204" pitchFamily="34" charset="0"/>
+                </a:rPr>
+                <a:t>Algorithm: </a:t>
+              </a:r>
+              <a:r>
+                <a:rPr lang="en-GB" sz="800" b="1" dirty="0">
+                  <a:solidFill>
+                    <a:schemeClr val="tx1">
+                      <a:lumMod val="85000"/>
+                      <a:lumOff val="15000"/>
+                    </a:schemeClr>
+                  </a:solidFill>
+                  <a:latin typeface="Calibri" panose="020F0502020204030204" pitchFamily="34" charset="0"/>
+                  <a:ea typeface="Calibri" panose="020F0502020204030204" pitchFamily="34" charset="0"/>
+                  <a:cs typeface="Calibri" panose="020F0502020204030204" pitchFamily="34" charset="0"/>
+                </a:rPr>
+                <a:t>Feed-forward neural network </a:t>
+              </a:r>
+            </a:p>
+            <a:p>
+              <a:r>
+                <a:rPr lang="en-GB" sz="800" dirty="0">
+                  <a:solidFill>
+                    <a:schemeClr val="tx1">
+                      <a:lumMod val="85000"/>
+                      <a:lumOff val="15000"/>
+                    </a:schemeClr>
+                  </a:solidFill>
+                  <a:latin typeface="Calibri Light" panose="020F0302020204030204" pitchFamily="34" charset="0"/>
+                  <a:ea typeface="Calibri Light" panose="020F0302020204030204" pitchFamily="34" charset="0"/>
+                  <a:cs typeface="Calibri Light" panose="020F0302020204030204" pitchFamily="34" charset="0"/>
+                </a:rPr>
+                <a:t>Implementation(s): Keras + TensorFlow</a:t>
+              </a:r>
+            </a:p>
+          </p:txBody>
+        </p:sp>
+        <p:sp>
+          <p:nvSpPr>
+            <p:cNvPr id="34" name="Oval 33">
+              <a:extLst>
+                <a:ext uri="{FF2B5EF4-FFF2-40B4-BE49-F238E27FC236}">
+                  <a16:creationId xmlns:a16="http://schemas.microsoft.com/office/drawing/2014/main" id="{AF6F7306-7237-ACF1-4BD0-361B5EB6DD34}"/>
+                </a:ext>
+              </a:extLst>
+            </p:cNvPr>
+            <p:cNvSpPr/>
+            <p:nvPr/>
+          </p:nvSpPr>
+          <p:spPr>
+            <a:xfrm>
+              <a:off x="51759" y="1177113"/>
+              <a:ext cx="540000" cy="540000"/>
+            </a:xfrm>
+            <a:prstGeom prst="ellipse">
+              <a:avLst/>
+            </a:prstGeom>
+            <a:solidFill>
+              <a:srgbClr val="5CB48E"/>
+            </a:solidFill>
+            <a:ln>
+              <a:noFill/>
+            </a:ln>
+          </p:spPr>
+          <p:style>
+            <a:lnRef idx="2">
+              <a:schemeClr val="accent1">
+                <a:shade val="15000"/>
+              </a:schemeClr>
+            </a:lnRef>
+            <a:fillRef idx="1">
+              <a:schemeClr val="accent1"/>
+            </a:fillRef>
+            <a:effectRef idx="0">
+              <a:schemeClr val="accent1"/>
+            </a:effectRef>
+            <a:fontRef idx="minor">
+              <a:schemeClr val="lt1"/>
+            </a:fontRef>
+          </p:style>
+          <p:txBody>
+            <a:bodyPr rtlCol="0" anchor="ctr"/>
+            <a:lstStyle/>
+            <a:p>
+              <a:pPr algn="ctr"/>
+              <a:endParaRPr lang="it-IT"/>
+            </a:p>
+          </p:txBody>
+        </p:sp>
+        <p:pic>
+          <p:nvPicPr>
+            <p:cNvPr id="38" name="Picture 37">
+              <a:extLst>
+                <a:ext uri="{FF2B5EF4-FFF2-40B4-BE49-F238E27FC236}">
+                  <a16:creationId xmlns:a16="http://schemas.microsoft.com/office/drawing/2014/main" id="{2E65243E-E0E5-70E1-BD42-77525EC94B42}"/>
+                </a:ext>
+              </a:extLst>
+            </p:cNvPr>
+            <p:cNvPicPr>
+              <a:picLocks noChangeAspect="1"/>
+            </p:cNvPicPr>
+            <p:nvPr/>
+          </p:nvPicPr>
+          <p:blipFill>
+            <a:blip r:embed="rId3">
+              <a:clrChange>
+                <a:clrFrom>
+                  <a:srgbClr val="FFFDDB"/>
+                </a:clrFrom>
+                <a:clrTo>
+                  <a:srgbClr val="FFFDDB">
+                    <a:alpha val="0"/>
+                  </a:srgbClr>
+                </a:clrTo>
+              </a:clrChange>
+              <a:grayscl/>
+              <a:extLst>
+                <a:ext uri="{BEBA8EAE-BF5A-486C-A8C5-ECC9F3942E4B}">
+                  <a14:imgProps xmlns:a14="http://schemas.microsoft.com/office/drawing/2010/main">
+                    <a14:imgLayer r:embed="rId4">
+                      <a14:imgEffect>
+                        <a14:colorTemperature colorTemp="11200"/>
+                      </a14:imgEffect>
+                      <a14:imgEffect>
+                        <a14:saturation sat="400000"/>
+                      </a14:imgEffect>
+                    </a14:imgLayer>
+                  </a14:imgProps>
+                </a:ext>
+              </a:extLst>
+            </a:blip>
+            <a:stretch>
+              <a:fillRect/>
+            </a:stretch>
+          </p:blipFill>
+          <p:spPr>
+            <a:xfrm>
+              <a:off x="125550" y="1267113"/>
+              <a:ext cx="392417" cy="360000"/>
+            </a:xfrm>
+            <a:prstGeom prst="rect">
+              <a:avLst/>
+            </a:prstGeom>
+          </p:spPr>
+        </p:pic>
+        <p:sp>
+          <p:nvSpPr>
+            <p:cNvPr id="39" name="Oval 38">
+              <a:extLst>
+                <a:ext uri="{FF2B5EF4-FFF2-40B4-BE49-F238E27FC236}">
+                  <a16:creationId xmlns:a16="http://schemas.microsoft.com/office/drawing/2014/main" id="{14EFAF95-6DE1-56F0-5604-18B87190C743}"/>
+                </a:ext>
+              </a:extLst>
+            </p:cNvPr>
+            <p:cNvSpPr/>
+            <p:nvPr/>
+          </p:nvSpPr>
+          <p:spPr>
+            <a:xfrm>
+              <a:off x="52258" y="597076"/>
+              <a:ext cx="540000" cy="540000"/>
+            </a:xfrm>
+            <a:prstGeom prst="ellipse">
+              <a:avLst/>
+            </a:prstGeom>
+            <a:solidFill>
+              <a:srgbClr val="FFC000"/>
+            </a:solidFill>
+            <a:ln>
+              <a:noFill/>
+            </a:ln>
+          </p:spPr>
+          <p:style>
+            <a:lnRef idx="2">
+              <a:schemeClr val="accent1">
+                <a:shade val="15000"/>
+              </a:schemeClr>
+            </a:lnRef>
+            <a:fillRef idx="1">
+              <a:schemeClr val="accent1"/>
+            </a:fillRef>
+            <a:effectRef idx="0">
+              <a:schemeClr val="accent1"/>
+            </a:effectRef>
+            <a:fontRef idx="minor">
+              <a:schemeClr val="lt1"/>
+            </a:fontRef>
+          </p:style>
+          <p:txBody>
+            <a:bodyPr rtlCol="0" anchor="ctr"/>
+            <a:lstStyle/>
+            <a:p>
+              <a:pPr algn="ctr"/>
+              <a:endParaRPr lang="it-IT"/>
+            </a:p>
+          </p:txBody>
+        </p:sp>
+        <p:sp>
+          <p:nvSpPr>
+            <p:cNvPr id="40" name="Oval 39">
+              <a:extLst>
+                <a:ext uri="{FF2B5EF4-FFF2-40B4-BE49-F238E27FC236}">
+                  <a16:creationId xmlns:a16="http://schemas.microsoft.com/office/drawing/2014/main" id="{F4B0B3BD-E28C-3EA5-DFB4-786F273A8F4D}"/>
+                </a:ext>
+              </a:extLst>
+            </p:cNvPr>
+            <p:cNvSpPr/>
+            <p:nvPr/>
+          </p:nvSpPr>
+          <p:spPr>
+            <a:xfrm>
+              <a:off x="51759" y="17040"/>
+              <a:ext cx="540000" cy="540000"/>
+            </a:xfrm>
+            <a:prstGeom prst="ellipse">
+              <a:avLst/>
+            </a:prstGeom>
+            <a:solidFill>
+              <a:srgbClr val="DE5C20"/>
+            </a:solidFill>
+            <a:ln>
+              <a:noFill/>
+            </a:ln>
+          </p:spPr>
+          <p:style>
+            <a:lnRef idx="2">
+              <a:schemeClr val="accent1">
+                <a:shade val="15000"/>
+              </a:schemeClr>
+            </a:lnRef>
+            <a:fillRef idx="1">
+              <a:schemeClr val="accent1"/>
+            </a:fillRef>
+            <a:effectRef idx="0">
+              <a:schemeClr val="accent1"/>
+            </a:effectRef>
+            <a:fontRef idx="minor">
+              <a:schemeClr val="lt1"/>
+            </a:fontRef>
+          </p:style>
+          <p:txBody>
+            <a:bodyPr rtlCol="0" anchor="ctr"/>
+            <a:lstStyle/>
+            <a:p>
+              <a:pPr algn="ctr"/>
+              <a:endParaRPr lang="it-IT"/>
+            </a:p>
+          </p:txBody>
+        </p:sp>
+        <p:pic>
+          <p:nvPicPr>
+            <p:cNvPr id="41" name="Picture 40">
+              <a:extLst>
+                <a:ext uri="{FF2B5EF4-FFF2-40B4-BE49-F238E27FC236}">
+                  <a16:creationId xmlns:a16="http://schemas.microsoft.com/office/drawing/2014/main" id="{3C84D770-A2A7-7A68-64A2-76AC8DEA743A}"/>
+                </a:ext>
+              </a:extLst>
+            </p:cNvPr>
+            <p:cNvPicPr>
+              <a:picLocks noChangeAspect="1"/>
+            </p:cNvPicPr>
+            <p:nvPr/>
+          </p:nvPicPr>
+          <p:blipFill>
+            <a:blip r:embed="rId5">
+              <a:clrChange>
+                <a:clrFrom>
+                  <a:srgbClr val="FFFFFF"/>
+                </a:clrFrom>
+                <a:clrTo>
+                  <a:srgbClr val="FFFFFF">
+                    <a:alpha val="0"/>
+                  </a:srgbClr>
+                </a:clrTo>
+              </a:clrChange>
+            </a:blip>
+            <a:srcRect l="12361" t="16528" r="11986" b="16667"/>
+            <a:stretch>
+              <a:fillRect/>
+            </a:stretch>
+          </p:blipFill>
+          <p:spPr>
+            <a:xfrm>
+              <a:off x="117920" y="107040"/>
+              <a:ext cx="407678" cy="360000"/>
+            </a:xfrm>
+            <a:prstGeom prst="rect">
+              <a:avLst/>
+            </a:prstGeom>
+          </p:spPr>
+        </p:pic>
+        <p:pic>
+          <p:nvPicPr>
+            <p:cNvPr id="42" name="Picture 41">
+              <a:extLst>
+                <a:ext uri="{FF2B5EF4-FFF2-40B4-BE49-F238E27FC236}">
+                  <a16:creationId xmlns:a16="http://schemas.microsoft.com/office/drawing/2014/main" id="{CAE3763B-0C01-2DF0-2543-B1907A30238C}"/>
+                </a:ext>
+              </a:extLst>
+            </p:cNvPr>
+            <p:cNvPicPr>
+              <a:picLocks noChangeAspect="1"/>
+            </p:cNvPicPr>
+            <p:nvPr/>
+          </p:nvPicPr>
+          <p:blipFill>
+            <a:blip r:embed="rId6">
+              <a:clrChange>
+                <a:clrFrom>
+                  <a:srgbClr val="FFFFFF"/>
+                </a:clrFrom>
+                <a:clrTo>
+                  <a:srgbClr val="FFFFFF">
+                    <a:alpha val="0"/>
+                  </a:srgbClr>
+                </a:clrTo>
+              </a:clrChange>
+            </a:blip>
+            <a:stretch>
+              <a:fillRect/>
+            </a:stretch>
+          </p:blipFill>
+          <p:spPr>
+            <a:xfrm>
+              <a:off x="126549" y="687076"/>
+              <a:ext cx="391418" cy="360000"/>
+            </a:xfrm>
+            <a:prstGeom prst="rect">
+              <a:avLst/>
+            </a:prstGeom>
+          </p:spPr>
+        </p:pic>
+      </p:grpSp>
+      <p:sp>
+        <p:nvSpPr>
+          <p:cNvPr id="43" name="TextBox 42">
+            <a:extLst>
+              <a:ext uri="{FF2B5EF4-FFF2-40B4-BE49-F238E27FC236}">
+                <a16:creationId xmlns:a16="http://schemas.microsoft.com/office/drawing/2014/main" id="{755373BA-31C0-2D0F-0B4F-E9754078968B}"/>
               </a:ext>
             </a:extLst>
           </p:cNvPr>
@@ -3733,8 +4411,8 @@
         </p:nvSpPr>
         <p:spPr>
           <a:xfrm>
-            <a:off x="610604" y="56207"/>
-            <a:ext cx="2513987" cy="461665"/>
+            <a:off x="-82463" y="-71328"/>
+            <a:ext cx="4382614" cy="430887"/>
           </a:xfrm>
           <a:prstGeom prst="rect">
             <a:avLst/>
@@ -3748,566 +4426,36 @@
           <a:lstStyle/>
           <a:p>
             <a:r>
-              <a:rPr lang="en-GB" sz="800" dirty="0">
+              <a:rPr lang="en-US" sz="1200" b="1" dirty="0">
                 <a:solidFill>
                   <a:schemeClr val="tx1">
                     <a:lumMod val="85000"/>
                     <a:lumOff val="15000"/>
                   </a:schemeClr>
                 </a:solidFill>
-                <a:latin typeface="Arial Nova Light" panose="020B0304020202020204" pitchFamily="34" charset="0"/>
+                <a:latin typeface="Calibri" panose="020F0502020204030204" pitchFamily="34" charset="0"/>
+                <a:cs typeface="Calibri" panose="020F0502020204030204" pitchFamily="34" charset="0"/>
               </a:rPr>
-              <a:t>Family:</a:t>
-            </a:r>
-            <a:r>
-              <a:rPr lang="en-GB" sz="800" b="1" dirty="0">
+              <a:t>Ensemble data-driven model architectures</a:t>
+            </a:r>
+          </a:p>
+          <a:p>
+            <a:r>
+              <a:rPr lang="en-US" sz="1000" dirty="0">
                 <a:solidFill>
                   <a:schemeClr val="tx1">
                     <a:lumMod val="85000"/>
                     <a:lumOff val="15000"/>
                   </a:schemeClr>
                 </a:solidFill>
-                <a:latin typeface="Arial Nova" panose="020B0504020202020204" pitchFamily="34" charset="0"/>
+                <a:latin typeface="Calibri Light" panose="020F0302020204030204" pitchFamily="34" charset="0"/>
+                <a:cs typeface="Calibri Light" panose="020F0302020204030204" pitchFamily="34" charset="0"/>
               </a:rPr>
-              <a:t> </a:t>
-            </a:r>
-            <a:r>
-              <a:rPr lang="en-GB" sz="800" dirty="0">
-                <a:solidFill>
-                  <a:schemeClr val="tx1">
-                    <a:lumMod val="85000"/>
-                    <a:lumOff val="15000"/>
-                  </a:schemeClr>
-                </a:solidFill>
-                <a:latin typeface="Arial Nova Light" panose="020B0304020202020204" pitchFamily="34" charset="0"/>
-              </a:rPr>
-              <a:t>Bagging</a:t>
-            </a:r>
-          </a:p>
-          <a:p>
-            <a:r>
-              <a:rPr lang="en-GB" sz="800" dirty="0">
-                <a:solidFill>
-                  <a:schemeClr val="tx1">
-                    <a:lumMod val="85000"/>
-                    <a:lumOff val="15000"/>
-                  </a:schemeClr>
-                </a:solidFill>
-                <a:latin typeface="Arial Nova Light" panose="020B0304020202020204" pitchFamily="34" charset="0"/>
-              </a:rPr>
-              <a:t>Algorithm: </a:t>
-            </a:r>
-            <a:r>
-              <a:rPr lang="en-GB" sz="800" b="1" dirty="0">
-                <a:solidFill>
-                  <a:schemeClr val="tx1">
-                    <a:lumMod val="85000"/>
-                    <a:lumOff val="15000"/>
-                  </a:schemeClr>
-                </a:solidFill>
-                <a:latin typeface="Arial Nova "/>
-              </a:rPr>
-              <a:t>Random Forest </a:t>
-            </a:r>
-          </a:p>
-          <a:p>
-            <a:r>
-              <a:rPr lang="en-GB" sz="800" dirty="0">
-                <a:solidFill>
-                  <a:schemeClr val="tx1">
-                    <a:lumMod val="85000"/>
-                    <a:lumOff val="15000"/>
-                  </a:schemeClr>
-                </a:solidFill>
-                <a:latin typeface="Arial Nova Light" panose="020B0304020202020204" pitchFamily="34" charset="0"/>
-              </a:rPr>
-              <a:t>Implementation(s): XGBoost - RF | LightGBM - RF</a:t>
-            </a:r>
-          </a:p>
-        </p:txBody>
-      </p:sp>
-      <p:sp>
-        <p:nvSpPr>
-          <p:cNvPr id="18" name="TextBox 17">
-            <a:extLst>
-              <a:ext uri="{FF2B5EF4-FFF2-40B4-BE49-F238E27FC236}">
-                <a16:creationId xmlns:a16="http://schemas.microsoft.com/office/drawing/2014/main" id="{D7DE0A7F-FCD3-FD48-0A9C-2B36992C28EF}"/>
-              </a:ext>
-            </a:extLst>
-          </p:cNvPr>
-          <p:cNvSpPr txBox="1"/>
-          <p:nvPr/>
-        </p:nvSpPr>
-        <p:spPr>
-          <a:xfrm>
-            <a:off x="610604" y="633561"/>
-            <a:ext cx="2513987" cy="461665"/>
-          </a:xfrm>
-          <a:prstGeom prst="rect">
-            <a:avLst/>
-          </a:prstGeom>
-          <a:noFill/>
-        </p:spPr>
-        <p:txBody>
-          <a:bodyPr wrap="square" rtlCol="0">
-            <a:spAutoFit/>
-          </a:bodyPr>
-          <a:lstStyle/>
-          <a:p>
-            <a:r>
-              <a:rPr lang="en-GB" sz="800" dirty="0">
-                <a:solidFill>
-                  <a:schemeClr val="tx1">
-                    <a:lumMod val="85000"/>
-                    <a:lumOff val="15000"/>
-                  </a:schemeClr>
-                </a:solidFill>
-                <a:latin typeface="Arial Nova Light" panose="020B0304020202020204" pitchFamily="34" charset="0"/>
-              </a:rPr>
-              <a:t>Family: Boosting</a:t>
-            </a:r>
-          </a:p>
-          <a:p>
-            <a:r>
-              <a:rPr lang="en-GB" sz="800" dirty="0">
-                <a:solidFill>
-                  <a:schemeClr val="tx1">
-                    <a:lumMod val="85000"/>
-                    <a:lumOff val="15000"/>
-                  </a:schemeClr>
-                </a:solidFill>
-                <a:latin typeface="Arial Nova Light" panose="020B0304020202020204" pitchFamily="34" charset="0"/>
-              </a:rPr>
-              <a:t>Algorithm: </a:t>
-            </a:r>
-            <a:r>
-              <a:rPr lang="en-GB" sz="800" b="1" dirty="0">
-                <a:solidFill>
-                  <a:schemeClr val="tx1">
-                    <a:lumMod val="85000"/>
-                    <a:lumOff val="15000"/>
-                  </a:schemeClr>
-                </a:solidFill>
-                <a:latin typeface="Arial Nova" panose="020B0504020202020204" pitchFamily="34" charset="0"/>
-              </a:rPr>
-              <a:t>Gradient Boosting</a:t>
-            </a:r>
-          </a:p>
-          <a:p>
-            <a:r>
-              <a:rPr lang="en-GB" sz="800" dirty="0">
-                <a:solidFill>
-                  <a:schemeClr val="tx1">
-                    <a:lumMod val="85000"/>
-                    <a:lumOff val="15000"/>
-                  </a:schemeClr>
-                </a:solidFill>
-                <a:latin typeface="Arial Nova Light" panose="020B0304020202020204" pitchFamily="34" charset="0"/>
-              </a:rPr>
-              <a:t>Implementation(s): XGBoost | LightGBM | CatBoost</a:t>
-            </a:r>
-          </a:p>
-        </p:txBody>
-      </p:sp>
-      <p:sp>
-        <p:nvSpPr>
-          <p:cNvPr id="19" name="TextBox 18">
-            <a:extLst>
-              <a:ext uri="{FF2B5EF4-FFF2-40B4-BE49-F238E27FC236}">
-                <a16:creationId xmlns:a16="http://schemas.microsoft.com/office/drawing/2014/main" id="{FDD47B8C-923F-C61A-E03C-069006159CDB}"/>
-              </a:ext>
-            </a:extLst>
-          </p:cNvPr>
-          <p:cNvSpPr txBox="1"/>
-          <p:nvPr/>
-        </p:nvSpPr>
-        <p:spPr>
-          <a:xfrm>
-            <a:off x="610604" y="1216280"/>
-            <a:ext cx="2513987" cy="461665"/>
-          </a:xfrm>
-          <a:prstGeom prst="rect">
-            <a:avLst/>
-          </a:prstGeom>
-          <a:noFill/>
-        </p:spPr>
-        <p:txBody>
-          <a:bodyPr wrap="square" rtlCol="0">
-            <a:spAutoFit/>
-          </a:bodyPr>
-          <a:lstStyle/>
-          <a:p>
-            <a:r>
-              <a:rPr lang="en-GB" sz="800" dirty="0">
-                <a:solidFill>
-                  <a:schemeClr val="tx1">
-                    <a:lumMod val="85000"/>
-                    <a:lumOff val="15000"/>
-                  </a:schemeClr>
-                </a:solidFill>
-                <a:latin typeface="Arial Nova Light" panose="020B0304020202020204" pitchFamily="34" charset="0"/>
-              </a:rPr>
-              <a:t>Family: </a:t>
-            </a:r>
-            <a:r>
-              <a:rPr lang="en-GB" sz="800">
-                <a:solidFill>
-                  <a:schemeClr val="tx1">
-                    <a:lumMod val="85000"/>
-                    <a:lumOff val="15000"/>
-                  </a:schemeClr>
-                </a:solidFill>
-                <a:latin typeface="Arial Nova Light" panose="020B0304020202020204" pitchFamily="34" charset="0"/>
-              </a:rPr>
-              <a:t>Neural networks</a:t>
-            </a:r>
-            <a:endParaRPr lang="en-GB" sz="800" dirty="0">
-              <a:solidFill>
-                <a:schemeClr val="tx1">
-                  <a:lumMod val="85000"/>
-                  <a:lumOff val="15000"/>
-                </a:schemeClr>
-              </a:solidFill>
-              <a:latin typeface="Arial Nova Light" panose="020B0304020202020204" pitchFamily="34" charset="0"/>
-            </a:endParaRPr>
-          </a:p>
-          <a:p>
-            <a:r>
-              <a:rPr lang="en-GB" sz="800" dirty="0">
-                <a:solidFill>
-                  <a:schemeClr val="tx1">
-                    <a:lumMod val="85000"/>
-                    <a:lumOff val="15000"/>
-                  </a:schemeClr>
-                </a:solidFill>
-                <a:latin typeface="Arial Nova Light" panose="020B0304020202020204" pitchFamily="34" charset="0"/>
-              </a:rPr>
-              <a:t>Algorithm: </a:t>
-            </a:r>
-            <a:r>
-              <a:rPr lang="en-GB" sz="800" b="1" dirty="0">
-                <a:solidFill>
-                  <a:schemeClr val="tx1">
-                    <a:lumMod val="85000"/>
-                    <a:lumOff val="15000"/>
-                  </a:schemeClr>
-                </a:solidFill>
-                <a:latin typeface="Arial Nova" panose="020B0504020202020204" pitchFamily="34" charset="0"/>
-              </a:rPr>
-              <a:t>Feed-forward neural network </a:t>
-            </a:r>
-          </a:p>
-          <a:p>
-            <a:r>
-              <a:rPr lang="en-GB" sz="800" dirty="0">
-                <a:solidFill>
-                  <a:schemeClr val="tx1">
-                    <a:lumMod val="85000"/>
-                    <a:lumOff val="15000"/>
-                  </a:schemeClr>
-                </a:solidFill>
-                <a:latin typeface="Arial Nova Light" panose="020B0304020202020204" pitchFamily="34" charset="0"/>
-              </a:rPr>
-              <a:t>Implementation(s): Keras + TensorFlow</a:t>
-            </a:r>
-          </a:p>
-        </p:txBody>
-      </p:sp>
-      <p:sp>
-        <p:nvSpPr>
-          <p:cNvPr id="20" name="Oval 19">
-            <a:extLst>
-              <a:ext uri="{FF2B5EF4-FFF2-40B4-BE49-F238E27FC236}">
-                <a16:creationId xmlns:a16="http://schemas.microsoft.com/office/drawing/2014/main" id="{AF6F7306-7237-ACF1-4BD0-361B5EB6DD34}"/>
-              </a:ext>
-            </a:extLst>
-          </p:cNvPr>
-          <p:cNvSpPr/>
-          <p:nvPr/>
-        </p:nvSpPr>
-        <p:spPr>
-          <a:xfrm>
-            <a:off x="51759" y="1177113"/>
-            <a:ext cx="540000" cy="540000"/>
-          </a:xfrm>
-          <a:prstGeom prst="ellipse">
-            <a:avLst/>
-          </a:prstGeom>
-          <a:solidFill>
-            <a:srgbClr val="5CB48E"/>
-          </a:solidFill>
-          <a:ln>
-            <a:noFill/>
-          </a:ln>
-        </p:spPr>
-        <p:style>
-          <a:lnRef idx="2">
-            <a:schemeClr val="accent1">
-              <a:shade val="15000"/>
-            </a:schemeClr>
-          </a:lnRef>
-          <a:fillRef idx="1">
-            <a:schemeClr val="accent1"/>
-          </a:fillRef>
-          <a:effectRef idx="0">
-            <a:schemeClr val="accent1"/>
-          </a:effectRef>
-          <a:fontRef idx="minor">
-            <a:schemeClr val="lt1"/>
-          </a:fontRef>
-        </p:style>
-        <p:txBody>
-          <a:bodyPr rtlCol="0" anchor="ctr"/>
-          <a:lstStyle/>
-          <a:p>
-            <a:pPr algn="ctr"/>
-            <a:endParaRPr lang="it-IT"/>
-          </a:p>
-        </p:txBody>
-      </p:sp>
-      <p:pic>
-        <p:nvPicPr>
-          <p:cNvPr id="21" name="Picture 20">
-            <a:extLst>
-              <a:ext uri="{FF2B5EF4-FFF2-40B4-BE49-F238E27FC236}">
-                <a16:creationId xmlns:a16="http://schemas.microsoft.com/office/drawing/2014/main" id="{2E65243E-E0E5-70E1-BD42-77525EC94B42}"/>
-              </a:ext>
-            </a:extLst>
-          </p:cNvPr>
-          <p:cNvPicPr>
-            <a:picLocks noChangeAspect="1"/>
-          </p:cNvPicPr>
-          <p:nvPr/>
-        </p:nvPicPr>
-        <p:blipFill>
-          <a:blip r:embed="rId3">
-            <a:clrChange>
-              <a:clrFrom>
-                <a:srgbClr val="FFFDDB"/>
-              </a:clrFrom>
-              <a:clrTo>
-                <a:srgbClr val="FFFDDB">
-                  <a:alpha val="0"/>
-                </a:srgbClr>
-              </a:clrTo>
-            </a:clrChange>
-            <a:grayscl/>
-            <a:extLst>
-              <a:ext uri="{BEBA8EAE-BF5A-486C-A8C5-ECC9F3942E4B}">
-                <a14:imgProps xmlns:a14="http://schemas.microsoft.com/office/drawing/2010/main">
-                  <a14:imgLayer r:embed="rId4">
-                    <a14:imgEffect>
-                      <a14:colorTemperature colorTemp="11200"/>
-                    </a14:imgEffect>
-                    <a14:imgEffect>
-                      <a14:saturation sat="400000"/>
-                    </a14:imgEffect>
-                  </a14:imgLayer>
-                </a14:imgProps>
-              </a:ext>
-            </a:extLst>
-          </a:blip>
-          <a:stretch>
-            <a:fillRect/>
-          </a:stretch>
-        </p:blipFill>
-        <p:spPr>
-          <a:xfrm>
-            <a:off x="125550" y="1267113"/>
-            <a:ext cx="392417" cy="360000"/>
-          </a:xfrm>
-          <a:prstGeom prst="rect">
-            <a:avLst/>
-          </a:prstGeom>
-        </p:spPr>
-      </p:pic>
-      <p:sp>
-        <p:nvSpPr>
-          <p:cNvPr id="22" name="Oval 21">
-            <a:extLst>
-              <a:ext uri="{FF2B5EF4-FFF2-40B4-BE49-F238E27FC236}">
-                <a16:creationId xmlns:a16="http://schemas.microsoft.com/office/drawing/2014/main" id="{14EFAF95-6DE1-56F0-5604-18B87190C743}"/>
-              </a:ext>
-            </a:extLst>
-          </p:cNvPr>
-          <p:cNvSpPr/>
-          <p:nvPr/>
-        </p:nvSpPr>
-        <p:spPr>
-          <a:xfrm>
-            <a:off x="52258" y="597076"/>
-            <a:ext cx="540000" cy="540000"/>
-          </a:xfrm>
-          <a:prstGeom prst="ellipse">
-            <a:avLst/>
-          </a:prstGeom>
-          <a:solidFill>
-            <a:srgbClr val="FFC000"/>
-          </a:solidFill>
-          <a:ln>
-            <a:noFill/>
-          </a:ln>
-        </p:spPr>
-        <p:style>
-          <a:lnRef idx="2">
-            <a:schemeClr val="accent1">
-              <a:shade val="15000"/>
-            </a:schemeClr>
-          </a:lnRef>
-          <a:fillRef idx="1">
-            <a:schemeClr val="accent1"/>
-          </a:fillRef>
-          <a:effectRef idx="0">
-            <a:schemeClr val="accent1"/>
-          </a:effectRef>
-          <a:fontRef idx="minor">
-            <a:schemeClr val="lt1"/>
-          </a:fontRef>
-        </p:style>
-        <p:txBody>
-          <a:bodyPr rtlCol="0" anchor="ctr"/>
-          <a:lstStyle/>
-          <a:p>
-            <a:pPr algn="ctr"/>
-            <a:endParaRPr lang="it-IT"/>
-          </a:p>
-        </p:txBody>
-      </p:sp>
-      <p:sp>
-        <p:nvSpPr>
-          <p:cNvPr id="35" name="Oval 34">
-            <a:extLst>
-              <a:ext uri="{FF2B5EF4-FFF2-40B4-BE49-F238E27FC236}">
-                <a16:creationId xmlns:a16="http://schemas.microsoft.com/office/drawing/2014/main" id="{F4B0B3BD-E28C-3EA5-DFB4-786F273A8F4D}"/>
-              </a:ext>
-            </a:extLst>
-          </p:cNvPr>
-          <p:cNvSpPr/>
-          <p:nvPr/>
-        </p:nvSpPr>
-        <p:spPr>
-          <a:xfrm>
-            <a:off x="51759" y="17040"/>
-            <a:ext cx="540000" cy="540000"/>
-          </a:xfrm>
-          <a:prstGeom prst="ellipse">
-            <a:avLst/>
-          </a:prstGeom>
-          <a:solidFill>
-            <a:srgbClr val="DE5C20"/>
-          </a:solidFill>
-          <a:ln>
-            <a:noFill/>
-          </a:ln>
-        </p:spPr>
-        <p:style>
-          <a:lnRef idx="2">
-            <a:schemeClr val="accent1">
-              <a:shade val="15000"/>
-            </a:schemeClr>
-          </a:lnRef>
-          <a:fillRef idx="1">
-            <a:schemeClr val="accent1"/>
-          </a:fillRef>
-          <a:effectRef idx="0">
-            <a:schemeClr val="accent1"/>
-          </a:effectRef>
-          <a:fontRef idx="minor">
-            <a:schemeClr val="lt1"/>
-          </a:fontRef>
-        </p:style>
-        <p:txBody>
-          <a:bodyPr rtlCol="0" anchor="ctr"/>
-          <a:lstStyle/>
-          <a:p>
-            <a:pPr algn="ctr"/>
-            <a:endParaRPr lang="it-IT"/>
-          </a:p>
-        </p:txBody>
-      </p:sp>
-      <p:pic>
-        <p:nvPicPr>
-          <p:cNvPr id="36" name="Picture 35">
-            <a:extLst>
-              <a:ext uri="{FF2B5EF4-FFF2-40B4-BE49-F238E27FC236}">
-                <a16:creationId xmlns:a16="http://schemas.microsoft.com/office/drawing/2014/main" id="{3C84D770-A2A7-7A68-64A2-76AC8DEA743A}"/>
-              </a:ext>
-            </a:extLst>
-          </p:cNvPr>
-          <p:cNvPicPr>
-            <a:picLocks noChangeAspect="1"/>
-          </p:cNvPicPr>
-          <p:nvPr/>
-        </p:nvPicPr>
-        <p:blipFill>
-          <a:blip r:embed="rId5">
-            <a:clrChange>
-              <a:clrFrom>
-                <a:srgbClr val="FFFFFF"/>
-              </a:clrFrom>
-              <a:clrTo>
-                <a:srgbClr val="FFFFFF">
-                  <a:alpha val="0"/>
-                </a:srgbClr>
-              </a:clrTo>
-            </a:clrChange>
-          </a:blip>
-          <a:srcRect l="12361" t="16528" r="11986" b="16667"/>
-          <a:stretch>
-            <a:fillRect/>
-          </a:stretch>
-        </p:blipFill>
-        <p:spPr>
-          <a:xfrm>
-            <a:off x="117920" y="107040"/>
-            <a:ext cx="407678" cy="360000"/>
-          </a:xfrm>
-          <a:prstGeom prst="rect">
-            <a:avLst/>
-          </a:prstGeom>
-        </p:spPr>
-      </p:pic>
-      <p:pic>
-        <p:nvPicPr>
-          <p:cNvPr id="37" name="Picture 36">
-            <a:extLst>
-              <a:ext uri="{FF2B5EF4-FFF2-40B4-BE49-F238E27FC236}">
-                <a16:creationId xmlns:a16="http://schemas.microsoft.com/office/drawing/2014/main" id="{CAE3763B-0C01-2DF0-2543-B1907A30238C}"/>
-              </a:ext>
-            </a:extLst>
-          </p:cNvPr>
-          <p:cNvPicPr>
-            <a:picLocks noChangeAspect="1"/>
-          </p:cNvPicPr>
-          <p:nvPr/>
-        </p:nvPicPr>
-        <p:blipFill>
-          <a:blip r:embed="rId6">
-            <a:clrChange>
-              <a:clrFrom>
-                <a:srgbClr val="FFFFFF"/>
-              </a:clrFrom>
-              <a:clrTo>
-                <a:srgbClr val="FFFFFF">
-                  <a:alpha val="0"/>
-                </a:srgbClr>
-              </a:clrTo>
-            </a:clrChange>
-          </a:blip>
-          <a:stretch>
-            <a:fillRect/>
-          </a:stretch>
-        </p:blipFill>
-        <p:spPr>
-          <a:xfrm>
-            <a:off x="126549" y="687076"/>
-            <a:ext cx="391418" cy="360000"/>
-          </a:xfrm>
-          <a:prstGeom prst="rect">
-            <a:avLst/>
-          </a:prstGeom>
-        </p:spPr>
-      </p:pic>
+              <a:t>Overview</a:t>
+            </a:r>
+          </a:p>
+        </p:txBody>
+      </p:sp>
     </p:spTree>
     <p:extLst>
       <p:ext uri="{BB962C8B-B14F-4D97-AF65-F5344CB8AC3E}">

--- a/chapter_06/figures/ai_models.pptx
+++ b/chapter_06/figures/ai_models.pptx
@@ -128,12 +128,12 @@
   <pc:docChgLst>
     <pc:chgData name="Fatima Pillosu" userId="a6295d4dc9e22643" providerId="LiveId" clId="{87453732-75AC-4426-B5D3-B7C69C2D4F54}"/>
     <pc:docChg chg="undo custSel modSld">
-      <pc:chgData name="Fatima Pillosu" userId="a6295d4dc9e22643" providerId="LiveId" clId="{87453732-75AC-4426-B5D3-B7C69C2D4F54}" dt="2026-01-26T16:00:45.763" v="614" actId="1035"/>
+      <pc:chgData name="Fatima Pillosu" userId="a6295d4dc9e22643" providerId="LiveId" clId="{87453732-75AC-4426-B5D3-B7C69C2D4F54}" dt="2026-01-26T22:41:40.487" v="623" actId="20577"/>
       <pc:docMkLst>
         <pc:docMk/>
       </pc:docMkLst>
       <pc:sldChg chg="addSp delSp modSp mod">
-        <pc:chgData name="Fatima Pillosu" userId="a6295d4dc9e22643" providerId="LiveId" clId="{87453732-75AC-4426-B5D3-B7C69C2D4F54}" dt="2026-01-26T16:00:45.763" v="614" actId="1035"/>
+        <pc:chgData name="Fatima Pillosu" userId="a6295d4dc9e22643" providerId="LiveId" clId="{87453732-75AC-4426-B5D3-B7C69C2D4F54}" dt="2026-01-26T22:41:40.487" v="623" actId="20577"/>
         <pc:sldMkLst>
           <pc:docMk/>
           <pc:sldMk cId="445470335" sldId="256"/>
@@ -291,7 +291,7 @@
           </ac:spMkLst>
         </pc:spChg>
         <pc:spChg chg="mod">
-          <ac:chgData name="Fatima Pillosu" userId="a6295d4dc9e22643" providerId="LiveId" clId="{87453732-75AC-4426-B5D3-B7C69C2D4F54}" dt="2026-01-26T16:00:39.488" v="608"/>
+          <ac:chgData name="Fatima Pillosu" userId="a6295d4dc9e22643" providerId="LiveId" clId="{87453732-75AC-4426-B5D3-B7C69C2D4F54}" dt="2026-01-26T22:41:33.797" v="617" actId="20577"/>
           <ac:spMkLst>
             <pc:docMk/>
             <pc:sldMk cId="445470335" sldId="256"/>
@@ -299,7 +299,7 @@
           </ac:spMkLst>
         </pc:spChg>
         <pc:spChg chg="mod">
-          <ac:chgData name="Fatima Pillosu" userId="a6295d4dc9e22643" providerId="LiveId" clId="{87453732-75AC-4426-B5D3-B7C69C2D4F54}" dt="2026-01-26T16:00:39.488" v="608"/>
+          <ac:chgData name="Fatima Pillosu" userId="a6295d4dc9e22643" providerId="LiveId" clId="{87453732-75AC-4426-B5D3-B7C69C2D4F54}" dt="2026-01-26T22:41:37.681" v="620" actId="20577"/>
           <ac:spMkLst>
             <pc:docMk/>
             <pc:sldMk cId="445470335" sldId="256"/>
@@ -307,7 +307,7 @@
           </ac:spMkLst>
         </pc:spChg>
         <pc:spChg chg="mod">
-          <ac:chgData name="Fatima Pillosu" userId="a6295d4dc9e22643" providerId="LiveId" clId="{87453732-75AC-4426-B5D3-B7C69C2D4F54}" dt="2026-01-26T16:00:39.488" v="608"/>
+          <ac:chgData name="Fatima Pillosu" userId="a6295d4dc9e22643" providerId="LiveId" clId="{87453732-75AC-4426-B5D3-B7C69C2D4F54}" dt="2026-01-26T22:41:40.487" v="623" actId="20577"/>
           <ac:spMkLst>
             <pc:docMk/>
             <pc:sldMk cId="445470335" sldId="256"/>
@@ -3840,7 +3840,7 @@
                   <a:ea typeface="Calibri Light" panose="020F0302020204030204" pitchFamily="34" charset="0"/>
                   <a:cs typeface="Calibri Light" panose="020F0302020204030204" pitchFamily="34" charset="0"/>
                 </a:rPr>
-                <a:t>Family:</a:t>
+                <a:t>a) Family:</a:t>
               </a:r>
               <a:r>
                 <a:rPr lang="en-GB" sz="800" b="1" dirty="0">
@@ -3959,7 +3959,7 @@
                   <a:ea typeface="Calibri Light" panose="020F0302020204030204" pitchFamily="34" charset="0"/>
                   <a:cs typeface="Calibri Light" panose="020F0302020204030204" pitchFamily="34" charset="0"/>
                 </a:rPr>
-                <a:t>Family: Boosting</a:t>
+                <a:t>b) Family: Boosting</a:t>
               </a:r>
             </a:p>
             <a:p>
@@ -4039,6 +4039,20 @@
             <a:lstStyle/>
             <a:p>
               <a:r>
+                <a:rPr lang="en-GB" sz="800">
+                  <a:solidFill>
+                    <a:schemeClr val="tx1">
+                      <a:lumMod val="85000"/>
+                      <a:lumOff val="15000"/>
+                    </a:schemeClr>
+                  </a:solidFill>
+                  <a:latin typeface="Calibri Light" panose="020F0302020204030204" pitchFamily="34" charset="0"/>
+                  <a:ea typeface="Calibri Light" panose="020F0302020204030204" pitchFamily="34" charset="0"/>
+                  <a:cs typeface="Calibri Light" panose="020F0302020204030204" pitchFamily="34" charset="0"/>
+                </a:rPr>
+                <a:t>c) Family</a:t>
+              </a:r>
+              <a:r>
                 <a:rPr lang="en-GB" sz="800" dirty="0">
                   <a:solidFill>
                     <a:schemeClr val="tx1">
@@ -4050,7 +4064,7 @@
                   <a:ea typeface="Calibri Light" panose="020F0302020204030204" pitchFamily="34" charset="0"/>
                   <a:cs typeface="Calibri Light" panose="020F0302020204030204" pitchFamily="34" charset="0"/>
                 </a:rPr>
-                <a:t>Family: Neural networks</a:t>
+                <a:t>: Neural networks</a:t>
               </a:r>
             </a:p>
             <a:p>
